--- a/assets/figures-editable/c1-c2/c2-e09.pptx
+++ b/assets/figures-editable/c1-c2/c2-e09.pptx
@@ -7,7 +7,7 @@
   <p:sldIdLst>
     <p:sldId id="256" r:id="rId7"/>
   </p:sldIdLst>
-  <p:sldSz cx="11948160" cy="7924799" type="screen4x3"/>
+  <p:sldSz cx="12191695" cy="6858000" type="screen4x3"/>
   <p:notesSz cx="6858000" cy="9144000"/>
   <p:defaultTextStyle>
     <a:defPPr>
@@ -3098,14 +3098,14 @@
       <p:grpSpPr/>
       <p:sp>
         <p:nvSpPr>
-          <p:cNvPr id="2" name="text1" descr="sci-ppt:C2-E09-001"/>
+          <p:cNvPr id="2" name="C2-E09 text 0" descr="sci-ppt:o000"/>
           <p:cNvSpPr txBox="1"/>
           <p:nvPr/>
         </p:nvSpPr>
         <p:spPr>
           <a:xfrm>
-            <a:off x="316992" y="268224"/>
-            <a:ext cx="11277600" cy="359054"/>
+            <a:off x="274320" y="118872"/>
+            <a:ext cx="11612880" cy="340105"/>
           </a:xfrm>
           <a:prstGeom prst="rect">
             <a:avLst/>
@@ -3114,7 +3114,7 @@
           <a:effectLst/>
         </p:spPr>
         <p:txBody>
-          <a:bodyPr wrap="none" lIns="27432" rIns="27432" tIns="18288" bIns="18288" anchor="ctr">
+          <a:bodyPr wrap="none" lIns="18288" rIns="18288" tIns="18288" bIns="18288" anchor="t">
             <a:spAutoFit/>
           </a:bodyPr>
           <a:lstStyle/>
@@ -3125,34 +3125,31 @@
               </a:spcAft>
             </a:pPr>
             <a:r>
-              <a:rPr sz="1823" b="0" i="0">
+              <a:rPr sz="1900" b="1" i="0">
                 <a:solidFill>
                   <a:srgbClr val="8EDBD4"/>
                 </a:solidFill>
                 <a:latin typeface="Arial"/>
               </a:rPr>
-              <a:t>C2-E09 | Physical-variable diagram</a:t>
-            </a:r>
-          </a:p>
-        </p:txBody>
-      </p:sp>
-      <p:sp>
-        <p:nvSpPr>
-          <p:cNvPr id="3" name="rect2" descr="sci-ppt:C2-E09-002"/>
-          <p:cNvSpPr/>
-          <p:nvPr/>
-        </p:nvSpPr>
-        <p:spPr>
-          <a:xfrm>
-            <a:off x="1219200" y="1524000"/>
-            <a:ext cx="3048000" cy="2438400"/>
-          </a:xfrm>
-          <a:prstGeom prst="rect">
-            <a:avLst/>
-          </a:prstGeom>
-          <a:solidFill>
-            <a:srgbClr val="F6BC77"/>
-          </a:solidFill>
+              <a:t>C2-E09 · Diffusive scaling derived from the heat equation</a:t>
+            </a:r>
+          </a:p>
+        </p:txBody>
+      </p:sp>
+      <p:cxnSp>
+        <p:nvCxnSpPr>
+          <p:cNvPr id="3" name="C2-E09 line 1" descr="sci-ppt:o001"/>
+          <p:cNvCxnSpPr/>
+          <p:nvPr/>
+        </p:nvCxnSpPr>
+        <p:spPr>
+          <a:xfrm>
+            <a:off x="914400" y="5029200"/>
+            <a:ext cx="5120640" cy="0"/>
+          </a:xfrm>
+          <a:prstGeom prst="line">
+            <a:avLst/>
+          </a:prstGeom>
           <a:ln w="19050">
             <a:solidFill>
               <a:srgbClr val="B4C7D2"/>
@@ -3160,31 +3157,21 @@
           </a:ln>
           <a:effectLst/>
         </p:spPr>
-        <p:txBody>
-          <a:bodyPr rtlCol="0" anchor="ctr"/>
-          <a:lstStyle/>
-          <a:p>
-            <a:pPr algn="ctr"/>
-          </a:p>
-        </p:txBody>
-      </p:sp>
-      <p:sp>
-        <p:nvSpPr>
-          <p:cNvPr id="4" name="rect3" descr="sci-ppt:C2-E09-003"/>
-          <p:cNvSpPr/>
-          <p:nvPr/>
-        </p:nvSpPr>
-        <p:spPr>
-          <a:xfrm>
-            <a:off x="4267200" y="1524000"/>
-            <a:ext cx="4876800" cy="2438400"/>
-          </a:xfrm>
-          <a:prstGeom prst="rect">
-            <a:avLst/>
-          </a:prstGeom>
-          <a:solidFill>
-            <a:srgbClr val="213E4B"/>
-          </a:solidFill>
+      </p:cxnSp>
+      <p:cxnSp>
+        <p:nvCxnSpPr>
+          <p:cNvPr id="4" name="C2-E09 line 2" descr="sci-ppt:o002"/>
+          <p:cNvCxnSpPr/>
+          <p:nvPr/>
+        </p:nvCxnSpPr>
+        <p:spPr>
+          <a:xfrm>
+            <a:off x="914400" y="1371600"/>
+            <a:ext cx="0" cy="3657600"/>
+          </a:xfrm>
+          <a:prstGeom prst="line">
+            <a:avLst/>
+          </a:prstGeom>
           <a:ln w="19050">
             <a:solidFill>
               <a:srgbClr val="B4C7D2"/>
@@ -3192,24 +3179,61 @@
           </a:ln>
           <a:effectLst/>
         </p:spPr>
-        <p:txBody>
-          <a:bodyPr rtlCol="0" anchor="ctr"/>
-          <a:lstStyle/>
-          <a:p>
-            <a:pPr algn="ctr"/>
-          </a:p>
-        </p:txBody>
-      </p:sp>
-      <p:sp>
-        <p:nvSpPr>
-          <p:cNvPr id="5" name="text4" descr="sci-ppt:C2-E09-004"/>
+      </p:cxnSp>
+      <p:cxnSp>
+        <p:nvCxnSpPr>
+          <p:cNvPr id="5" name="C2-E09 line 3" descr="sci-ppt:o003"/>
+          <p:cNvCxnSpPr/>
+          <p:nvPr/>
+        </p:nvCxnSpPr>
+        <p:spPr>
+          <a:xfrm>
+            <a:off x="914400" y="5029200"/>
+            <a:ext cx="0" cy="64008"/>
+          </a:xfrm>
+          <a:prstGeom prst="line">
+            <a:avLst/>
+          </a:prstGeom>
+          <a:ln w="12700">
+            <a:solidFill>
+              <a:srgbClr val="B4C7D2"/>
+            </a:solidFill>
+          </a:ln>
+          <a:effectLst/>
+        </p:spPr>
+      </p:cxnSp>
+      <p:cxnSp>
+        <p:nvCxnSpPr>
+          <p:cNvPr id="6" name="C2-E09 line 4" descr="sci-ppt:o004"/>
+          <p:cNvCxnSpPr/>
+          <p:nvPr/>
+        </p:nvCxnSpPr>
+        <p:spPr>
+          <a:xfrm>
+            <a:off x="914400" y="1371600"/>
+            <a:ext cx="0" cy="3657600"/>
+          </a:xfrm>
+          <a:prstGeom prst="line">
+            <a:avLst/>
+          </a:prstGeom>
+          <a:ln w="7620">
+            <a:solidFill>
+              <a:srgbClr val="2E4756"/>
+            </a:solidFill>
+          </a:ln>
+          <a:effectLst/>
+        </p:spPr>
+      </p:cxnSp>
+      <p:sp>
+        <p:nvSpPr>
+          <p:cNvPr id="7" name="C2-E09 text 5" descr="sci-ppt:o005"/>
           <p:cNvSpPr txBox="1"/>
           <p:nvPr/>
         </p:nvSpPr>
         <p:spPr>
           <a:xfrm>
-            <a:off x="1524000" y="1828800"/>
-            <a:ext cx="3657600" cy="396849"/>
+            <a:off x="457200" y="5111496"/>
+            <a:ext cx="914400" cy="208407"/>
           </a:xfrm>
           <a:prstGeom prst="rect">
             <a:avLst/>
@@ -3218,7 +3242,697 @@
           <a:effectLst/>
         </p:spPr>
         <p:txBody>
-          <a:bodyPr wrap="none" lIns="27432" rIns="27432" tIns="18288" bIns="18288" anchor="ctr">
+          <a:bodyPr wrap="none" lIns="18288" rIns="18288" tIns="18288" bIns="18288" anchor="t">
+            <a:spAutoFit/>
+          </a:bodyPr>
+          <a:lstStyle/>
+          <a:p>
+            <a:pPr algn="ctr">
+              <a:spcAft>
+                <a:spcPts val="0"/>
+              </a:spcAft>
+            </a:pPr>
+            <a:r>
+              <a:rPr sz="1050" b="0" i="0">
+                <a:solidFill>
+                  <a:srgbClr val="B4C7D2"/>
+                </a:solidFill>
+                <a:latin typeface="Arial"/>
+              </a:rPr>
+              <a:t>1e-09</a:t>
+            </a:r>
+          </a:p>
+        </p:txBody>
+      </p:sp>
+      <p:cxnSp>
+        <p:nvCxnSpPr>
+          <p:cNvPr id="8" name="C2-E09 line 6" descr="sci-ppt:o006"/>
+          <p:cNvCxnSpPr/>
+          <p:nvPr/>
+        </p:nvCxnSpPr>
+        <p:spPr>
+          <a:xfrm>
+            <a:off x="2621279" y="5029200"/>
+            <a:ext cx="0" cy="64008"/>
+          </a:xfrm>
+          <a:prstGeom prst="line">
+            <a:avLst/>
+          </a:prstGeom>
+          <a:ln w="12700">
+            <a:solidFill>
+              <a:srgbClr val="B4C7D2"/>
+            </a:solidFill>
+          </a:ln>
+          <a:effectLst/>
+        </p:spPr>
+      </p:cxnSp>
+      <p:cxnSp>
+        <p:nvCxnSpPr>
+          <p:cNvPr id="9" name="C2-E09 line 7" descr="sci-ppt:o007"/>
+          <p:cNvCxnSpPr/>
+          <p:nvPr/>
+        </p:nvCxnSpPr>
+        <p:spPr>
+          <a:xfrm>
+            <a:off x="2621279" y="1371600"/>
+            <a:ext cx="0" cy="3657600"/>
+          </a:xfrm>
+          <a:prstGeom prst="line">
+            <a:avLst/>
+          </a:prstGeom>
+          <a:ln w="7620">
+            <a:solidFill>
+              <a:srgbClr val="2E4756"/>
+            </a:solidFill>
+          </a:ln>
+          <a:effectLst/>
+        </p:spPr>
+      </p:cxnSp>
+      <p:sp>
+        <p:nvSpPr>
+          <p:cNvPr id="10" name="C2-E09 text 8" descr="sci-ppt:o008"/>
+          <p:cNvSpPr txBox="1"/>
+          <p:nvPr/>
+        </p:nvSpPr>
+        <p:spPr>
+          <a:xfrm>
+            <a:off x="2164079" y="5111496"/>
+            <a:ext cx="914400" cy="208407"/>
+          </a:xfrm>
+          <a:prstGeom prst="rect">
+            <a:avLst/>
+          </a:prstGeom>
+          <a:noFill/>
+          <a:effectLst/>
+        </p:spPr>
+        <p:txBody>
+          <a:bodyPr wrap="none" lIns="18288" rIns="18288" tIns="18288" bIns="18288" anchor="t">
+            <a:spAutoFit/>
+          </a:bodyPr>
+          <a:lstStyle/>
+          <a:p>
+            <a:pPr algn="ctr">
+              <a:spcAft>
+                <a:spcPts val="0"/>
+              </a:spcAft>
+            </a:pPr>
+            <a:r>
+              <a:rPr sz="1050" b="0" i="0">
+                <a:solidFill>
+                  <a:srgbClr val="B4C7D2"/>
+                </a:solidFill>
+                <a:latin typeface="Arial"/>
+              </a:rPr>
+              <a:t>1e-07</a:t>
+            </a:r>
+          </a:p>
+        </p:txBody>
+      </p:sp>
+      <p:cxnSp>
+        <p:nvCxnSpPr>
+          <p:cNvPr id="11" name="C2-E09 line 9" descr="sci-ppt:o009"/>
+          <p:cNvCxnSpPr/>
+          <p:nvPr/>
+        </p:nvCxnSpPr>
+        <p:spPr>
+          <a:xfrm>
+            <a:off x="4328159" y="5029200"/>
+            <a:ext cx="0" cy="64008"/>
+          </a:xfrm>
+          <a:prstGeom prst="line">
+            <a:avLst/>
+          </a:prstGeom>
+          <a:ln w="12700">
+            <a:solidFill>
+              <a:srgbClr val="B4C7D2"/>
+            </a:solidFill>
+          </a:ln>
+          <a:effectLst/>
+        </p:spPr>
+      </p:cxnSp>
+      <p:cxnSp>
+        <p:nvCxnSpPr>
+          <p:cNvPr id="12" name="C2-E09 line 10" descr="sci-ppt:o010"/>
+          <p:cNvCxnSpPr/>
+          <p:nvPr/>
+        </p:nvCxnSpPr>
+        <p:spPr>
+          <a:xfrm>
+            <a:off x="4328159" y="1371600"/>
+            <a:ext cx="0" cy="3657600"/>
+          </a:xfrm>
+          <a:prstGeom prst="line">
+            <a:avLst/>
+          </a:prstGeom>
+          <a:ln w="7620">
+            <a:solidFill>
+              <a:srgbClr val="2E4756"/>
+            </a:solidFill>
+          </a:ln>
+          <a:effectLst/>
+        </p:spPr>
+      </p:cxnSp>
+      <p:sp>
+        <p:nvSpPr>
+          <p:cNvPr id="13" name="C2-E09 text 11" descr="sci-ppt:o011"/>
+          <p:cNvSpPr txBox="1"/>
+          <p:nvPr/>
+        </p:nvSpPr>
+        <p:spPr>
+          <a:xfrm>
+            <a:off x="3870959" y="5111496"/>
+            <a:ext cx="914400" cy="208407"/>
+          </a:xfrm>
+          <a:prstGeom prst="rect">
+            <a:avLst/>
+          </a:prstGeom>
+          <a:noFill/>
+          <a:effectLst/>
+        </p:spPr>
+        <p:txBody>
+          <a:bodyPr wrap="none" lIns="18288" rIns="18288" tIns="18288" bIns="18288" anchor="t">
+            <a:spAutoFit/>
+          </a:bodyPr>
+          <a:lstStyle/>
+          <a:p>
+            <a:pPr algn="ctr">
+              <a:spcAft>
+                <a:spcPts val="0"/>
+              </a:spcAft>
+            </a:pPr>
+            <a:r>
+              <a:rPr sz="1050" b="0" i="0">
+                <a:solidFill>
+                  <a:srgbClr val="B4C7D2"/>
+                </a:solidFill>
+                <a:latin typeface="Arial"/>
+              </a:rPr>
+              <a:t>1e-05</a:t>
+            </a:r>
+          </a:p>
+        </p:txBody>
+      </p:sp>
+      <p:cxnSp>
+        <p:nvCxnSpPr>
+          <p:cNvPr id="14" name="C2-E09 line 12" descr="sci-ppt:o012"/>
+          <p:cNvCxnSpPr/>
+          <p:nvPr/>
+        </p:nvCxnSpPr>
+        <p:spPr>
+          <a:xfrm>
+            <a:off x="6035040" y="5029200"/>
+            <a:ext cx="0" cy="64008"/>
+          </a:xfrm>
+          <a:prstGeom prst="line">
+            <a:avLst/>
+          </a:prstGeom>
+          <a:ln w="12700">
+            <a:solidFill>
+              <a:srgbClr val="B4C7D2"/>
+            </a:solidFill>
+          </a:ln>
+          <a:effectLst/>
+        </p:spPr>
+      </p:cxnSp>
+      <p:cxnSp>
+        <p:nvCxnSpPr>
+          <p:cNvPr id="15" name="C2-E09 line 13" descr="sci-ppt:o013"/>
+          <p:cNvCxnSpPr/>
+          <p:nvPr/>
+        </p:nvCxnSpPr>
+        <p:spPr>
+          <a:xfrm>
+            <a:off x="6035040" y="1371600"/>
+            <a:ext cx="0" cy="3657600"/>
+          </a:xfrm>
+          <a:prstGeom prst="line">
+            <a:avLst/>
+          </a:prstGeom>
+          <a:ln w="7620">
+            <a:solidFill>
+              <a:srgbClr val="2E4756"/>
+            </a:solidFill>
+          </a:ln>
+          <a:effectLst/>
+        </p:spPr>
+      </p:cxnSp>
+      <p:sp>
+        <p:nvSpPr>
+          <p:cNvPr id="16" name="C2-E09 text 14" descr="sci-ppt:o014"/>
+          <p:cNvSpPr txBox="1"/>
+          <p:nvPr/>
+        </p:nvSpPr>
+        <p:spPr>
+          <a:xfrm>
+            <a:off x="5577840" y="5111496"/>
+            <a:ext cx="914400" cy="208407"/>
+          </a:xfrm>
+          <a:prstGeom prst="rect">
+            <a:avLst/>
+          </a:prstGeom>
+          <a:noFill/>
+          <a:effectLst/>
+        </p:spPr>
+        <p:txBody>
+          <a:bodyPr wrap="none" lIns="18288" rIns="18288" tIns="18288" bIns="18288" anchor="t">
+            <a:spAutoFit/>
+          </a:bodyPr>
+          <a:lstStyle/>
+          <a:p>
+            <a:pPr algn="ctr">
+              <a:spcAft>
+                <a:spcPts val="0"/>
+              </a:spcAft>
+            </a:pPr>
+            <a:r>
+              <a:rPr sz="1050" b="0" i="0">
+                <a:solidFill>
+                  <a:srgbClr val="B4C7D2"/>
+                </a:solidFill>
+                <a:latin typeface="Arial"/>
+              </a:rPr>
+              <a:t>1e-03</a:t>
+            </a:r>
+          </a:p>
+        </p:txBody>
+      </p:sp>
+      <p:cxnSp>
+        <p:nvCxnSpPr>
+          <p:cNvPr id="17" name="C2-E09 line 15" descr="sci-ppt:o015"/>
+          <p:cNvCxnSpPr/>
+          <p:nvPr/>
+        </p:nvCxnSpPr>
+        <p:spPr>
+          <a:xfrm>
+            <a:off x="850392" y="5029200"/>
+            <a:ext cx="64008" cy="0"/>
+          </a:xfrm>
+          <a:prstGeom prst="line">
+            <a:avLst/>
+          </a:prstGeom>
+          <a:ln w="12700">
+            <a:solidFill>
+              <a:srgbClr val="B4C7D2"/>
+            </a:solidFill>
+          </a:ln>
+          <a:effectLst/>
+        </p:spPr>
+      </p:cxnSp>
+      <p:cxnSp>
+        <p:nvCxnSpPr>
+          <p:cNvPr id="18" name="C2-E09 line 16" descr="sci-ppt:o016"/>
+          <p:cNvCxnSpPr/>
+          <p:nvPr/>
+        </p:nvCxnSpPr>
+        <p:spPr>
+          <a:xfrm>
+            <a:off x="850392" y="4114800"/>
+            <a:ext cx="64008" cy="0"/>
+          </a:xfrm>
+          <a:prstGeom prst="line">
+            <a:avLst/>
+          </a:prstGeom>
+          <a:ln w="12700">
+            <a:solidFill>
+              <a:srgbClr val="B4C7D2"/>
+            </a:solidFill>
+          </a:ln>
+          <a:effectLst/>
+        </p:spPr>
+      </p:cxnSp>
+      <p:cxnSp>
+        <p:nvCxnSpPr>
+          <p:cNvPr id="19" name="C2-E09 line 17" descr="sci-ppt:o017"/>
+          <p:cNvCxnSpPr/>
+          <p:nvPr/>
+        </p:nvCxnSpPr>
+        <p:spPr>
+          <a:xfrm>
+            <a:off x="914400" y="4114800"/>
+            <a:ext cx="5120640" cy="0"/>
+          </a:xfrm>
+          <a:prstGeom prst="line">
+            <a:avLst/>
+          </a:prstGeom>
+          <a:ln w="7620">
+            <a:solidFill>
+              <a:srgbClr val="2E4756"/>
+            </a:solidFill>
+          </a:ln>
+          <a:effectLst/>
+        </p:spPr>
+      </p:cxnSp>
+      <p:sp>
+        <p:nvSpPr>
+          <p:cNvPr id="20" name="C2-E09 text 18" descr="sci-ppt:o018"/>
+          <p:cNvSpPr txBox="1"/>
+          <p:nvPr/>
+        </p:nvSpPr>
+        <p:spPr>
+          <a:xfrm>
+            <a:off x="45720" y="4032504"/>
+            <a:ext cx="777240" cy="208407"/>
+          </a:xfrm>
+          <a:prstGeom prst="rect">
+            <a:avLst/>
+          </a:prstGeom>
+          <a:noFill/>
+          <a:effectLst/>
+        </p:spPr>
+        <p:txBody>
+          <a:bodyPr wrap="none" lIns="18288" rIns="18288" tIns="18288" bIns="18288" anchor="t">
+            <a:spAutoFit/>
+          </a:bodyPr>
+          <a:lstStyle/>
+          <a:p>
+            <a:pPr algn="r">
+              <a:spcAft>
+                <a:spcPts val="0"/>
+              </a:spcAft>
+            </a:pPr>
+            <a:r>
+              <a:rPr sz="1050" b="0" i="0">
+                <a:solidFill>
+                  <a:srgbClr val="B4C7D2"/>
+                </a:solidFill>
+                <a:latin typeface="Arial"/>
+              </a:rPr>
+              <a:t>1e-08</a:t>
+            </a:r>
+          </a:p>
+        </p:txBody>
+      </p:sp>
+      <p:cxnSp>
+        <p:nvCxnSpPr>
+          <p:cNvPr id="21" name="C2-E09 line 19" descr="sci-ppt:o019"/>
+          <p:cNvCxnSpPr/>
+          <p:nvPr/>
+        </p:nvCxnSpPr>
+        <p:spPr>
+          <a:xfrm>
+            <a:off x="850392" y="3200400"/>
+            <a:ext cx="64008" cy="0"/>
+          </a:xfrm>
+          <a:prstGeom prst="line">
+            <a:avLst/>
+          </a:prstGeom>
+          <a:ln w="12700">
+            <a:solidFill>
+              <a:srgbClr val="B4C7D2"/>
+            </a:solidFill>
+          </a:ln>
+          <a:effectLst/>
+        </p:spPr>
+      </p:cxnSp>
+      <p:cxnSp>
+        <p:nvCxnSpPr>
+          <p:cNvPr id="22" name="C2-E09 line 20" descr="sci-ppt:o020"/>
+          <p:cNvCxnSpPr/>
+          <p:nvPr/>
+        </p:nvCxnSpPr>
+        <p:spPr>
+          <a:xfrm>
+            <a:off x="914400" y="3200400"/>
+            <a:ext cx="5120640" cy="0"/>
+          </a:xfrm>
+          <a:prstGeom prst="line">
+            <a:avLst/>
+          </a:prstGeom>
+          <a:ln w="7620">
+            <a:solidFill>
+              <a:srgbClr val="2E4756"/>
+            </a:solidFill>
+          </a:ln>
+          <a:effectLst/>
+        </p:spPr>
+      </p:cxnSp>
+      <p:sp>
+        <p:nvSpPr>
+          <p:cNvPr id="23" name="C2-E09 text 21" descr="sci-ppt:o021"/>
+          <p:cNvSpPr txBox="1"/>
+          <p:nvPr/>
+        </p:nvSpPr>
+        <p:spPr>
+          <a:xfrm>
+            <a:off x="45720" y="3118104"/>
+            <a:ext cx="777240" cy="208407"/>
+          </a:xfrm>
+          <a:prstGeom prst="rect">
+            <a:avLst/>
+          </a:prstGeom>
+          <a:noFill/>
+          <a:effectLst/>
+        </p:spPr>
+        <p:txBody>
+          <a:bodyPr wrap="none" lIns="18288" rIns="18288" tIns="18288" bIns="18288" anchor="t">
+            <a:spAutoFit/>
+          </a:bodyPr>
+          <a:lstStyle/>
+          <a:p>
+            <a:pPr algn="r">
+              <a:spcAft>
+                <a:spcPts val="0"/>
+              </a:spcAft>
+            </a:pPr>
+            <a:r>
+              <a:rPr sz="1050" b="0" i="0">
+                <a:solidFill>
+                  <a:srgbClr val="B4C7D2"/>
+                </a:solidFill>
+                <a:latin typeface="Arial"/>
+              </a:rPr>
+              <a:t>1e-07</a:t>
+            </a:r>
+          </a:p>
+        </p:txBody>
+      </p:sp>
+      <p:cxnSp>
+        <p:nvCxnSpPr>
+          <p:cNvPr id="24" name="C2-E09 line 22" descr="sci-ppt:o022"/>
+          <p:cNvCxnSpPr/>
+          <p:nvPr/>
+        </p:nvCxnSpPr>
+        <p:spPr>
+          <a:xfrm>
+            <a:off x="850392" y="2286000"/>
+            <a:ext cx="64008" cy="0"/>
+          </a:xfrm>
+          <a:prstGeom prst="line">
+            <a:avLst/>
+          </a:prstGeom>
+          <a:ln w="12700">
+            <a:solidFill>
+              <a:srgbClr val="B4C7D2"/>
+            </a:solidFill>
+          </a:ln>
+          <a:effectLst/>
+        </p:spPr>
+      </p:cxnSp>
+      <p:cxnSp>
+        <p:nvCxnSpPr>
+          <p:cNvPr id="25" name="C2-E09 line 23" descr="sci-ppt:o023"/>
+          <p:cNvCxnSpPr/>
+          <p:nvPr/>
+        </p:nvCxnSpPr>
+        <p:spPr>
+          <a:xfrm>
+            <a:off x="914400" y="2286000"/>
+            <a:ext cx="5120640" cy="0"/>
+          </a:xfrm>
+          <a:prstGeom prst="line">
+            <a:avLst/>
+          </a:prstGeom>
+          <a:ln w="7620">
+            <a:solidFill>
+              <a:srgbClr val="2E4756"/>
+            </a:solidFill>
+          </a:ln>
+          <a:effectLst/>
+        </p:spPr>
+      </p:cxnSp>
+      <p:sp>
+        <p:nvSpPr>
+          <p:cNvPr id="26" name="C2-E09 text 24" descr="sci-ppt:o024"/>
+          <p:cNvSpPr txBox="1"/>
+          <p:nvPr/>
+        </p:nvSpPr>
+        <p:spPr>
+          <a:xfrm>
+            <a:off x="45720" y="2203704"/>
+            <a:ext cx="777240" cy="208407"/>
+          </a:xfrm>
+          <a:prstGeom prst="rect">
+            <a:avLst/>
+          </a:prstGeom>
+          <a:noFill/>
+          <a:effectLst/>
+        </p:spPr>
+        <p:txBody>
+          <a:bodyPr wrap="none" lIns="18288" rIns="18288" tIns="18288" bIns="18288" anchor="t">
+            <a:spAutoFit/>
+          </a:bodyPr>
+          <a:lstStyle/>
+          <a:p>
+            <a:pPr algn="r">
+              <a:spcAft>
+                <a:spcPts val="0"/>
+              </a:spcAft>
+            </a:pPr>
+            <a:r>
+              <a:rPr sz="1050" b="0" i="0">
+                <a:solidFill>
+                  <a:srgbClr val="B4C7D2"/>
+                </a:solidFill>
+                <a:latin typeface="Arial"/>
+              </a:rPr>
+              <a:t>1e-06</a:t>
+            </a:r>
+          </a:p>
+        </p:txBody>
+      </p:sp>
+      <p:cxnSp>
+        <p:nvCxnSpPr>
+          <p:cNvPr id="27" name="C2-E09 line 25" descr="sci-ppt:o025"/>
+          <p:cNvCxnSpPr/>
+          <p:nvPr/>
+        </p:nvCxnSpPr>
+        <p:spPr>
+          <a:xfrm>
+            <a:off x="850392" y="1371600"/>
+            <a:ext cx="64008" cy="0"/>
+          </a:xfrm>
+          <a:prstGeom prst="line">
+            <a:avLst/>
+          </a:prstGeom>
+          <a:ln w="12700">
+            <a:solidFill>
+              <a:srgbClr val="B4C7D2"/>
+            </a:solidFill>
+          </a:ln>
+          <a:effectLst/>
+        </p:spPr>
+      </p:cxnSp>
+      <p:cxnSp>
+        <p:nvCxnSpPr>
+          <p:cNvPr id="28" name="C2-E09 line 26" descr="sci-ppt:o026"/>
+          <p:cNvCxnSpPr/>
+          <p:nvPr/>
+        </p:nvCxnSpPr>
+        <p:spPr>
+          <a:xfrm>
+            <a:off x="914400" y="1371600"/>
+            <a:ext cx="5120640" cy="0"/>
+          </a:xfrm>
+          <a:prstGeom prst="line">
+            <a:avLst/>
+          </a:prstGeom>
+          <a:ln w="7620">
+            <a:solidFill>
+              <a:srgbClr val="2E4756"/>
+            </a:solidFill>
+          </a:ln>
+          <a:effectLst/>
+        </p:spPr>
+      </p:cxnSp>
+      <p:sp>
+        <p:nvSpPr>
+          <p:cNvPr id="29" name="C2-E09 text 27" descr="sci-ppt:o027"/>
+          <p:cNvSpPr txBox="1"/>
+          <p:nvPr/>
+        </p:nvSpPr>
+        <p:spPr>
+          <a:xfrm>
+            <a:off x="45720" y="1289304"/>
+            <a:ext cx="777240" cy="208407"/>
+          </a:xfrm>
+          <a:prstGeom prst="rect">
+            <a:avLst/>
+          </a:prstGeom>
+          <a:noFill/>
+          <a:effectLst/>
+        </p:spPr>
+        <p:txBody>
+          <a:bodyPr wrap="none" lIns="18288" rIns="18288" tIns="18288" bIns="18288" anchor="t">
+            <a:spAutoFit/>
+          </a:bodyPr>
+          <a:lstStyle/>
+          <a:p>
+            <a:pPr algn="r">
+              <a:spcAft>
+                <a:spcPts val="0"/>
+              </a:spcAft>
+            </a:pPr>
+            <a:r>
+              <a:rPr sz="1050" b="0" i="0">
+                <a:solidFill>
+                  <a:srgbClr val="B4C7D2"/>
+                </a:solidFill>
+                <a:latin typeface="Arial"/>
+              </a:rPr>
+              <a:t>1e-05</a:t>
+            </a:r>
+          </a:p>
+        </p:txBody>
+      </p:sp>
+      <p:sp>
+        <p:nvSpPr>
+          <p:cNvPr id="30" name="C2-E09 text 28" descr="sci-ppt:o028"/>
+          <p:cNvSpPr txBox="1"/>
+          <p:nvPr/>
+        </p:nvSpPr>
+        <p:spPr>
+          <a:xfrm>
+            <a:off x="914400" y="5312664"/>
+            <a:ext cx="5120640" cy="231648"/>
+          </a:xfrm>
+          <a:prstGeom prst="rect">
+            <a:avLst/>
+          </a:prstGeom>
+          <a:noFill/>
+          <a:effectLst/>
+        </p:spPr>
+        <p:txBody>
+          <a:bodyPr wrap="none" lIns="18288" rIns="18288" tIns="18288" bIns="18288" anchor="t">
+            <a:spAutoFit/>
+          </a:bodyPr>
+          <a:lstStyle/>
+          <a:p>
+            <a:pPr algn="ctr">
+              <a:spcAft>
+                <a:spcPts val="0"/>
+              </a:spcAft>
+            </a:pPr>
+            <a:r>
+              <a:rPr sz="1200" b="0" i="0">
+                <a:solidFill>
+                  <a:srgbClr val="E7F0F3"/>
+                </a:solidFill>
+                <a:latin typeface="Arial"/>
+              </a:rPr>
+              <a:t>heating time τₕ  (s)</a:t>
+            </a:r>
+          </a:p>
+        </p:txBody>
+      </p:sp>
+      <p:sp>
+        <p:nvSpPr>
+          <p:cNvPr id="31" name="C2-E09 text 29" descr="sci-ppt:o029"/>
+          <p:cNvSpPr txBox="1"/>
+          <p:nvPr/>
+        </p:nvSpPr>
+        <p:spPr>
+          <a:xfrm>
+            <a:off x="365760" y="1024128"/>
+            <a:ext cx="5120640" cy="231648"/>
+          </a:xfrm>
+          <a:prstGeom prst="rect">
+            <a:avLst/>
+          </a:prstGeom>
+          <a:noFill/>
+          <a:effectLst/>
+        </p:spPr>
+        <p:txBody>
+          <a:bodyPr wrap="none" lIns="18288" rIns="18288" tIns="18288" bIns="18288" anchor="t">
             <a:spAutoFit/>
           </a:bodyPr>
           <a:lstStyle/>
@@ -3229,27 +3943,397 @@
               </a:spcAft>
             </a:pPr>
             <a:r>
-              <a:rPr sz="2016" b="0" i="0">
+              <a:rPr sz="1200" b="0" i="0">
                 <a:solidFill>
-                  <a:srgbClr val="142632"/>
+                  <a:srgbClr val="E7F0F3"/>
                 </a:solidFill>
                 <a:latin typeface="Arial"/>
               </a:rPr>
-              <a:t>Absorber / side A</a:t>
-            </a:r>
-          </a:p>
-        </p:txBody>
-      </p:sp>
-      <p:sp>
-        <p:nvSpPr>
-          <p:cNvPr id="6" name="text5" descr="sci-ppt:C2-E09-005"/>
+              <a:t>penetration δ_T  (m)</a:t>
+            </a:r>
+          </a:p>
+        </p:txBody>
+      </p:sp>
+      <p:sp>
+        <p:nvSpPr>
+          <p:cNvPr id="32" name="C2-E09 polygon 30" descr="sci-ppt:o030"/>
+          <p:cNvSpPr/>
+          <p:nvPr/>
+        </p:nvSpPr>
+        <p:spPr>
+          <a:xfrm>
+            <a:off x="914400" y="1521925"/>
+            <a:ext cx="5120640" cy="2743200"/>
+          </a:xfrm>
+          <a:custGeom>
+            <a:avLst/>
+            <a:gdLst/>
+            <a:ahLst/>
+            <a:cxnLst/>
+            <a:rect l="l" t="t" r="r" b="b"/>
+            <a:pathLst>
+              <a:path w="5120640" h="2743200">
+                <a:moveTo>
+                  <a:pt x="0" y="2743200"/>
+                </a:moveTo>
+                <a:lnTo>
+                  <a:pt x="51723" y="2715491"/>
+                </a:lnTo>
+                <a:lnTo>
+                  <a:pt x="103447" y="2687782"/>
+                </a:lnTo>
+                <a:lnTo>
+                  <a:pt x="155170" y="2660072"/>
+                </a:lnTo>
+                <a:lnTo>
+                  <a:pt x="206894" y="2632363"/>
+                </a:lnTo>
+                <a:lnTo>
+                  <a:pt x="258618" y="2604654"/>
+                </a:lnTo>
+                <a:lnTo>
+                  <a:pt x="310341" y="2576945"/>
+                </a:lnTo>
+                <a:lnTo>
+                  <a:pt x="362065" y="2549236"/>
+                </a:lnTo>
+                <a:lnTo>
+                  <a:pt x="413789" y="2521527"/>
+                </a:lnTo>
+                <a:lnTo>
+                  <a:pt x="465512" y="2493818"/>
+                </a:lnTo>
+                <a:lnTo>
+                  <a:pt x="517236" y="2466109"/>
+                </a:lnTo>
+                <a:lnTo>
+                  <a:pt x="568959" y="2438400"/>
+                </a:lnTo>
+                <a:lnTo>
+                  <a:pt x="620683" y="2410691"/>
+                </a:lnTo>
+                <a:lnTo>
+                  <a:pt x="672407" y="2382982"/>
+                </a:lnTo>
+                <a:lnTo>
+                  <a:pt x="724130" y="2355272"/>
+                </a:lnTo>
+                <a:lnTo>
+                  <a:pt x="775854" y="2327563"/>
+                </a:lnTo>
+                <a:lnTo>
+                  <a:pt x="827578" y="2299854"/>
+                </a:lnTo>
+                <a:lnTo>
+                  <a:pt x="879301" y="2272145"/>
+                </a:lnTo>
+                <a:lnTo>
+                  <a:pt x="931025" y="2244436"/>
+                </a:lnTo>
+                <a:lnTo>
+                  <a:pt x="982749" y="2216727"/>
+                </a:lnTo>
+                <a:lnTo>
+                  <a:pt x="1034472" y="2189018"/>
+                </a:lnTo>
+                <a:lnTo>
+                  <a:pt x="1086196" y="2161309"/>
+                </a:lnTo>
+                <a:lnTo>
+                  <a:pt x="1137920" y="2133600"/>
+                </a:lnTo>
+                <a:lnTo>
+                  <a:pt x="1189643" y="2105891"/>
+                </a:lnTo>
+                <a:lnTo>
+                  <a:pt x="1241367" y="2078182"/>
+                </a:lnTo>
+                <a:lnTo>
+                  <a:pt x="1293090" y="2050472"/>
+                </a:lnTo>
+                <a:lnTo>
+                  <a:pt x="1344814" y="2022763"/>
+                </a:lnTo>
+                <a:lnTo>
+                  <a:pt x="1396538" y="1995054"/>
+                </a:lnTo>
+                <a:lnTo>
+                  <a:pt x="1448261" y="1967345"/>
+                </a:lnTo>
+                <a:lnTo>
+                  <a:pt x="1499985" y="1939636"/>
+                </a:lnTo>
+                <a:lnTo>
+                  <a:pt x="1551709" y="1911927"/>
+                </a:lnTo>
+                <a:lnTo>
+                  <a:pt x="1603432" y="1884218"/>
+                </a:lnTo>
+                <a:lnTo>
+                  <a:pt x="1655156" y="1856509"/>
+                </a:lnTo>
+                <a:lnTo>
+                  <a:pt x="1706879" y="1828800"/>
+                </a:lnTo>
+                <a:lnTo>
+                  <a:pt x="1758603" y="1801091"/>
+                </a:lnTo>
+                <a:lnTo>
+                  <a:pt x="1810327" y="1773382"/>
+                </a:lnTo>
+                <a:lnTo>
+                  <a:pt x="1862050" y="1745672"/>
+                </a:lnTo>
+                <a:lnTo>
+                  <a:pt x="1913774" y="1717963"/>
+                </a:lnTo>
+                <a:lnTo>
+                  <a:pt x="1965498" y="1690254"/>
+                </a:lnTo>
+                <a:lnTo>
+                  <a:pt x="2017221" y="1662545"/>
+                </a:lnTo>
+                <a:lnTo>
+                  <a:pt x="2068945" y="1634836"/>
+                </a:lnTo>
+                <a:lnTo>
+                  <a:pt x="2120669" y="1607127"/>
+                </a:lnTo>
+                <a:lnTo>
+                  <a:pt x="2172392" y="1579418"/>
+                </a:lnTo>
+                <a:lnTo>
+                  <a:pt x="2224116" y="1551709"/>
+                </a:lnTo>
+                <a:lnTo>
+                  <a:pt x="2275840" y="1524000"/>
+                </a:lnTo>
+                <a:lnTo>
+                  <a:pt x="2327563" y="1496291"/>
+                </a:lnTo>
+                <a:lnTo>
+                  <a:pt x="2379287" y="1468582"/>
+                </a:lnTo>
+                <a:lnTo>
+                  <a:pt x="2431010" y="1440872"/>
+                </a:lnTo>
+                <a:lnTo>
+                  <a:pt x="2482734" y="1413163"/>
+                </a:lnTo>
+                <a:lnTo>
+                  <a:pt x="2534458" y="1385454"/>
+                </a:lnTo>
+                <a:lnTo>
+                  <a:pt x="2586181" y="1357745"/>
+                </a:lnTo>
+                <a:lnTo>
+                  <a:pt x="2637905" y="1330036"/>
+                </a:lnTo>
+                <a:lnTo>
+                  <a:pt x="2689629" y="1302327"/>
+                </a:lnTo>
+                <a:lnTo>
+                  <a:pt x="2741352" y="1274618"/>
+                </a:lnTo>
+                <a:lnTo>
+                  <a:pt x="2793076" y="1246909"/>
+                </a:lnTo>
+                <a:lnTo>
+                  <a:pt x="2844800" y="1219200"/>
+                </a:lnTo>
+                <a:lnTo>
+                  <a:pt x="2896523" y="1191491"/>
+                </a:lnTo>
+                <a:lnTo>
+                  <a:pt x="2948247" y="1163782"/>
+                </a:lnTo>
+                <a:lnTo>
+                  <a:pt x="2999970" y="1136072"/>
+                </a:lnTo>
+                <a:lnTo>
+                  <a:pt x="3051694" y="1108363"/>
+                </a:lnTo>
+                <a:lnTo>
+                  <a:pt x="3103418" y="1080654"/>
+                </a:lnTo>
+                <a:lnTo>
+                  <a:pt x="3155141" y="1052945"/>
+                </a:lnTo>
+                <a:lnTo>
+                  <a:pt x="3206865" y="1025236"/>
+                </a:lnTo>
+                <a:lnTo>
+                  <a:pt x="3258589" y="997527"/>
+                </a:lnTo>
+                <a:lnTo>
+                  <a:pt x="3310312" y="969818"/>
+                </a:lnTo>
+                <a:lnTo>
+                  <a:pt x="3362036" y="942109"/>
+                </a:lnTo>
+                <a:lnTo>
+                  <a:pt x="3413759" y="914400"/>
+                </a:lnTo>
+                <a:lnTo>
+                  <a:pt x="3465483" y="886691"/>
+                </a:lnTo>
+                <a:lnTo>
+                  <a:pt x="3517207" y="858982"/>
+                </a:lnTo>
+                <a:lnTo>
+                  <a:pt x="3568930" y="831272"/>
+                </a:lnTo>
+                <a:lnTo>
+                  <a:pt x="3620654" y="803563"/>
+                </a:lnTo>
+                <a:lnTo>
+                  <a:pt x="3672378" y="775854"/>
+                </a:lnTo>
+                <a:lnTo>
+                  <a:pt x="3724101" y="748145"/>
+                </a:lnTo>
+                <a:lnTo>
+                  <a:pt x="3775825" y="720436"/>
+                </a:lnTo>
+                <a:lnTo>
+                  <a:pt x="3827549" y="692727"/>
+                </a:lnTo>
+                <a:lnTo>
+                  <a:pt x="3879272" y="665018"/>
+                </a:lnTo>
+                <a:lnTo>
+                  <a:pt x="3930996" y="637309"/>
+                </a:lnTo>
+                <a:lnTo>
+                  <a:pt x="3982720" y="609600"/>
+                </a:lnTo>
+                <a:lnTo>
+                  <a:pt x="4034443" y="581891"/>
+                </a:lnTo>
+                <a:lnTo>
+                  <a:pt x="4086167" y="554182"/>
+                </a:lnTo>
+                <a:lnTo>
+                  <a:pt x="4137890" y="526472"/>
+                </a:lnTo>
+                <a:lnTo>
+                  <a:pt x="4189614" y="498763"/>
+                </a:lnTo>
+                <a:lnTo>
+                  <a:pt x="4241338" y="471054"/>
+                </a:lnTo>
+                <a:lnTo>
+                  <a:pt x="4293061" y="443345"/>
+                </a:lnTo>
+                <a:lnTo>
+                  <a:pt x="4344785" y="415636"/>
+                </a:lnTo>
+                <a:lnTo>
+                  <a:pt x="4396509" y="387927"/>
+                </a:lnTo>
+                <a:lnTo>
+                  <a:pt x="4448232" y="360218"/>
+                </a:lnTo>
+                <a:lnTo>
+                  <a:pt x="4499956" y="332509"/>
+                </a:lnTo>
+                <a:lnTo>
+                  <a:pt x="4551680" y="304800"/>
+                </a:lnTo>
+                <a:lnTo>
+                  <a:pt x="4603403" y="277091"/>
+                </a:lnTo>
+                <a:lnTo>
+                  <a:pt x="4655127" y="249382"/>
+                </a:lnTo>
+                <a:lnTo>
+                  <a:pt x="4706850" y="221672"/>
+                </a:lnTo>
+                <a:lnTo>
+                  <a:pt x="4758574" y="193963"/>
+                </a:lnTo>
+                <a:lnTo>
+                  <a:pt x="4810298" y="166254"/>
+                </a:lnTo>
+                <a:lnTo>
+                  <a:pt x="4862021" y="138545"/>
+                </a:lnTo>
+                <a:lnTo>
+                  <a:pt x="4913745" y="110836"/>
+                </a:lnTo>
+                <a:lnTo>
+                  <a:pt x="4965469" y="83127"/>
+                </a:lnTo>
+                <a:lnTo>
+                  <a:pt x="5017192" y="55418"/>
+                </a:lnTo>
+                <a:lnTo>
+                  <a:pt x="5068916" y="27709"/>
+                </a:lnTo>
+                <a:lnTo>
+                  <a:pt x="5120640" y="0"/>
+                </a:lnTo>
+              </a:path>
+            </a:pathLst>
+          </a:custGeom>
+          <a:noFill/>
+          <a:ln w="38100">
+            <a:solidFill>
+              <a:srgbClr val="8EDBD4"/>
+            </a:solidFill>
+          </a:ln>
+          <a:effectLst/>
+        </p:spPr>
+        <p:txBody>
+          <a:bodyPr rtlCol="0" anchor="ctr"/>
+          <a:lstStyle/>
+          <a:p>
+            <a:pPr algn="ctr"/>
+          </a:p>
+        </p:txBody>
+      </p:sp>
+      <p:sp>
+        <p:nvSpPr>
+          <p:cNvPr id="33" name="C2-E09 ellipse 31" descr="sci-ppt:o031"/>
+          <p:cNvSpPr/>
+          <p:nvPr/>
+        </p:nvSpPr>
+        <p:spPr>
+          <a:xfrm>
+            <a:off x="1694687" y="3734773"/>
+            <a:ext cx="146304" cy="146304"/>
+          </a:xfrm>
+          <a:prstGeom prst="ellipse">
+            <a:avLst/>
+          </a:prstGeom>
+          <a:solidFill>
+            <a:srgbClr val="F2B880"/>
+          </a:solidFill>
+          <a:ln w="12700">
+            <a:solidFill>
+              <a:srgbClr val="F2B880"/>
+            </a:solidFill>
+          </a:ln>
+          <a:effectLst/>
+        </p:spPr>
+        <p:txBody>
+          <a:bodyPr rtlCol="0" anchor="ctr"/>
+          <a:lstStyle/>
+          <a:p>
+            <a:pPr algn="ctr"/>
+          </a:p>
+        </p:txBody>
+      </p:sp>
+      <p:sp>
+        <p:nvSpPr>
+          <p:cNvPr id="34" name="C2-E09 text 32" descr="sci-ppt:o032"/>
           <p:cNvSpPr txBox="1"/>
           <p:nvPr/>
         </p:nvSpPr>
         <p:spPr>
           <a:xfrm>
-            <a:off x="5669280" y="1828800"/>
-            <a:ext cx="3657600" cy="396849"/>
+            <a:off x="1877568" y="3396445"/>
+            <a:ext cx="2194560" cy="231648"/>
           </a:xfrm>
           <a:prstGeom prst="rect">
             <a:avLst/>
@@ -3258,7 +4342,7 @@
           <a:effectLst/>
         </p:spPr>
         <p:txBody>
-          <a:bodyPr wrap="none" lIns="27432" rIns="27432" tIns="18288" bIns="18288" anchor="ctr">
+          <a:bodyPr wrap="none" lIns="18288" rIns="18288" tIns="18288" bIns="18288" anchor="t">
             <a:spAutoFit/>
           </a:bodyPr>
           <a:lstStyle/>
@@ -3269,51 +4353,593 @@
               </a:spcAft>
             </a:pPr>
             <a:r>
-              <a:rPr sz="2016" b="0" i="0">
+              <a:rPr sz="1200" b="0" i="0">
+                <a:solidFill>
+                  <a:srgbClr val="F2B880"/>
+                </a:solidFill>
+                <a:latin typeface="Arial"/>
+              </a:rPr>
+              <a:t>δ_T ≈ 22 nm at 10 ns</a:t>
+            </a:r>
+          </a:p>
+        </p:txBody>
+      </p:sp>
+      <p:sp>
+        <p:nvSpPr>
+          <p:cNvPr id="35" name="C2-E09 text 33" descr="sci-ppt:o033"/>
+          <p:cNvSpPr txBox="1"/>
+          <p:nvPr/>
+        </p:nvSpPr>
+        <p:spPr>
+          <a:xfrm>
+            <a:off x="3804783" y="3472836"/>
+            <a:ext cx="2194560" cy="247142"/>
+          </a:xfrm>
+          <a:prstGeom prst="rect">
+            <a:avLst/>
+          </a:prstGeom>
+          <a:noFill/>
+          <a:effectLst/>
+        </p:spPr>
+        <p:txBody>
+          <a:bodyPr wrap="none" lIns="18288" rIns="18288" tIns="18288" bIns="18288" anchor="t">
+            <a:spAutoFit/>
+          </a:bodyPr>
+          <a:lstStyle/>
+          <a:p>
+            <a:pPr algn="l">
+              <a:spcAft>
+                <a:spcPts val="0"/>
+              </a:spcAft>
+            </a:pPr>
+            <a:r>
+              <a:rPr sz="1300" b="0" i="0">
+                <a:solidFill>
+                  <a:srgbClr val="8EDBD4"/>
+                </a:solidFill>
+                <a:latin typeface="Arial"/>
+              </a:rPr>
+              <a:t>δ_T ~ √(α τₕ)</a:t>
+            </a:r>
+          </a:p>
+        </p:txBody>
+      </p:sp>
+      <p:cxnSp>
+        <p:nvCxnSpPr>
+          <p:cNvPr id="36" name="C2-E09 line 34" descr="sci-ppt:o034"/>
+          <p:cNvCxnSpPr/>
+          <p:nvPr/>
+        </p:nvCxnSpPr>
+        <p:spPr>
+          <a:xfrm>
+            <a:off x="6766560" y="5029200"/>
+            <a:ext cx="5029200" cy="0"/>
+          </a:xfrm>
+          <a:prstGeom prst="line">
+            <a:avLst/>
+          </a:prstGeom>
+          <a:ln w="19050">
+            <a:solidFill>
+              <a:srgbClr val="B4C7D2"/>
+            </a:solidFill>
+          </a:ln>
+          <a:effectLst/>
+        </p:spPr>
+      </p:cxnSp>
+      <p:cxnSp>
+        <p:nvCxnSpPr>
+          <p:cNvPr id="37" name="C2-E09 line 35" descr="sci-ppt:o035"/>
+          <p:cNvCxnSpPr/>
+          <p:nvPr/>
+        </p:nvCxnSpPr>
+        <p:spPr>
+          <a:xfrm>
+            <a:off x="6766560" y="1371600"/>
+            <a:ext cx="0" cy="3657600"/>
+          </a:xfrm>
+          <a:prstGeom prst="line">
+            <a:avLst/>
+          </a:prstGeom>
+          <a:ln w="19050">
+            <a:solidFill>
+              <a:srgbClr val="B4C7D2"/>
+            </a:solidFill>
+          </a:ln>
+          <a:effectLst/>
+        </p:spPr>
+      </p:cxnSp>
+      <p:cxnSp>
+        <p:nvCxnSpPr>
+          <p:cNvPr id="38" name="C2-E09 line 36" descr="sci-ppt:o036"/>
+          <p:cNvCxnSpPr/>
+          <p:nvPr/>
+        </p:nvCxnSpPr>
+        <p:spPr>
+          <a:xfrm>
+            <a:off x="6766560" y="5029200"/>
+            <a:ext cx="0" cy="64008"/>
+          </a:xfrm>
+          <a:prstGeom prst="line">
+            <a:avLst/>
+          </a:prstGeom>
+          <a:ln w="12700">
+            <a:solidFill>
+              <a:srgbClr val="B4C7D2"/>
+            </a:solidFill>
+          </a:ln>
+          <a:effectLst/>
+        </p:spPr>
+      </p:cxnSp>
+      <p:cxnSp>
+        <p:nvCxnSpPr>
+          <p:cNvPr id="39" name="C2-E09 line 37" descr="sci-ppt:o037"/>
+          <p:cNvCxnSpPr/>
+          <p:nvPr/>
+        </p:nvCxnSpPr>
+        <p:spPr>
+          <a:xfrm>
+            <a:off x="6766560" y="1371600"/>
+            <a:ext cx="0" cy="3657600"/>
+          </a:xfrm>
+          <a:prstGeom prst="line">
+            <a:avLst/>
+          </a:prstGeom>
+          <a:ln w="7620">
+            <a:solidFill>
+              <a:srgbClr val="2E4756"/>
+            </a:solidFill>
+          </a:ln>
+          <a:effectLst/>
+        </p:spPr>
+      </p:cxnSp>
+      <p:sp>
+        <p:nvSpPr>
+          <p:cNvPr id="40" name="C2-E09 text 38" descr="sci-ppt:o038"/>
+          <p:cNvSpPr txBox="1"/>
+          <p:nvPr/>
+        </p:nvSpPr>
+        <p:spPr>
+          <a:xfrm>
+            <a:off x="6309360" y="5111496"/>
+            <a:ext cx="914400" cy="208407"/>
+          </a:xfrm>
+          <a:prstGeom prst="rect">
+            <a:avLst/>
+          </a:prstGeom>
+          <a:noFill/>
+          <a:effectLst/>
+        </p:spPr>
+        <p:txBody>
+          <a:bodyPr wrap="none" lIns="18288" rIns="18288" tIns="18288" bIns="18288" anchor="t">
+            <a:spAutoFit/>
+          </a:bodyPr>
+          <a:lstStyle/>
+          <a:p>
+            <a:pPr algn="ctr">
+              <a:spcAft>
+                <a:spcPts val="0"/>
+              </a:spcAft>
+            </a:pPr>
+            <a:r>
+              <a:rPr sz="1050" b="0" i="0">
+                <a:solidFill>
+                  <a:srgbClr val="B4C7D2"/>
+                </a:solidFill>
+                <a:latin typeface="Arial"/>
+              </a:rPr>
+              <a:t>1e-08</a:t>
+            </a:r>
+          </a:p>
+        </p:txBody>
+      </p:sp>
+      <p:cxnSp>
+        <p:nvCxnSpPr>
+          <p:cNvPr id="41" name="C2-E09 line 39" descr="sci-ppt:o039"/>
+          <p:cNvCxnSpPr/>
+          <p:nvPr/>
+        </p:nvCxnSpPr>
+        <p:spPr>
+          <a:xfrm>
+            <a:off x="9281160" y="5029200"/>
+            <a:ext cx="0" cy="64008"/>
+          </a:xfrm>
+          <a:prstGeom prst="line">
+            <a:avLst/>
+          </a:prstGeom>
+          <a:ln w="12700">
+            <a:solidFill>
+              <a:srgbClr val="B4C7D2"/>
+            </a:solidFill>
+          </a:ln>
+          <a:effectLst/>
+        </p:spPr>
+      </p:cxnSp>
+      <p:cxnSp>
+        <p:nvCxnSpPr>
+          <p:cNvPr id="42" name="C2-E09 line 40" descr="sci-ppt:o040"/>
+          <p:cNvCxnSpPr/>
+          <p:nvPr/>
+        </p:nvCxnSpPr>
+        <p:spPr>
+          <a:xfrm>
+            <a:off x="9281160" y="1371600"/>
+            <a:ext cx="0" cy="3657600"/>
+          </a:xfrm>
+          <a:prstGeom prst="line">
+            <a:avLst/>
+          </a:prstGeom>
+          <a:ln w="7620">
+            <a:solidFill>
+              <a:srgbClr val="2E4756"/>
+            </a:solidFill>
+          </a:ln>
+          <a:effectLst/>
+        </p:spPr>
+      </p:cxnSp>
+      <p:sp>
+        <p:nvSpPr>
+          <p:cNvPr id="43" name="C2-E09 text 41" descr="sci-ppt:o041"/>
+          <p:cNvSpPr txBox="1"/>
+          <p:nvPr/>
+        </p:nvSpPr>
+        <p:spPr>
+          <a:xfrm>
+            <a:off x="8823960" y="5111496"/>
+            <a:ext cx="914400" cy="208407"/>
+          </a:xfrm>
+          <a:prstGeom prst="rect">
+            <a:avLst/>
+          </a:prstGeom>
+          <a:noFill/>
+          <a:effectLst/>
+        </p:spPr>
+        <p:txBody>
+          <a:bodyPr wrap="none" lIns="18288" rIns="18288" tIns="18288" bIns="18288" anchor="t">
+            <a:spAutoFit/>
+          </a:bodyPr>
+          <a:lstStyle/>
+          <a:p>
+            <a:pPr algn="ctr">
+              <a:spcAft>
+                <a:spcPts val="0"/>
+              </a:spcAft>
+            </a:pPr>
+            <a:r>
+              <a:rPr sz="1050" b="0" i="0">
+                <a:solidFill>
+                  <a:srgbClr val="B4C7D2"/>
+                </a:solidFill>
+                <a:latin typeface="Arial"/>
+              </a:rPr>
+              <a:t>1e-06</a:t>
+            </a:r>
+          </a:p>
+        </p:txBody>
+      </p:sp>
+      <p:cxnSp>
+        <p:nvCxnSpPr>
+          <p:cNvPr id="44" name="C2-E09 line 42" descr="sci-ppt:o042"/>
+          <p:cNvCxnSpPr/>
+          <p:nvPr/>
+        </p:nvCxnSpPr>
+        <p:spPr>
+          <a:xfrm>
+            <a:off x="11795760" y="5029200"/>
+            <a:ext cx="0" cy="64008"/>
+          </a:xfrm>
+          <a:prstGeom prst="line">
+            <a:avLst/>
+          </a:prstGeom>
+          <a:ln w="12700">
+            <a:solidFill>
+              <a:srgbClr val="B4C7D2"/>
+            </a:solidFill>
+          </a:ln>
+          <a:effectLst/>
+        </p:spPr>
+      </p:cxnSp>
+      <p:cxnSp>
+        <p:nvCxnSpPr>
+          <p:cNvPr id="45" name="C2-E09 line 43" descr="sci-ppt:o043"/>
+          <p:cNvCxnSpPr/>
+          <p:nvPr/>
+        </p:nvCxnSpPr>
+        <p:spPr>
+          <a:xfrm>
+            <a:off x="11795760" y="1371600"/>
+            <a:ext cx="0" cy="3657600"/>
+          </a:xfrm>
+          <a:prstGeom prst="line">
+            <a:avLst/>
+          </a:prstGeom>
+          <a:ln w="7620">
+            <a:solidFill>
+              <a:srgbClr val="2E4756"/>
+            </a:solidFill>
+          </a:ln>
+          <a:effectLst/>
+        </p:spPr>
+      </p:cxnSp>
+      <p:sp>
+        <p:nvSpPr>
+          <p:cNvPr id="46" name="C2-E09 text 44" descr="sci-ppt:o044"/>
+          <p:cNvSpPr txBox="1"/>
+          <p:nvPr/>
+        </p:nvSpPr>
+        <p:spPr>
+          <a:xfrm>
+            <a:off x="11338560" y="5111496"/>
+            <a:ext cx="914400" cy="208407"/>
+          </a:xfrm>
+          <a:prstGeom prst="rect">
+            <a:avLst/>
+          </a:prstGeom>
+          <a:noFill/>
+          <a:effectLst/>
+        </p:spPr>
+        <p:txBody>
+          <a:bodyPr wrap="none" lIns="18288" rIns="18288" tIns="18288" bIns="18288" anchor="t">
+            <a:spAutoFit/>
+          </a:bodyPr>
+          <a:lstStyle/>
+          <a:p>
+            <a:pPr algn="ctr">
+              <a:spcAft>
+                <a:spcPts val="0"/>
+              </a:spcAft>
+            </a:pPr>
+            <a:r>
+              <a:rPr sz="1050" b="0" i="0">
+                <a:solidFill>
+                  <a:srgbClr val="B4C7D2"/>
+                </a:solidFill>
+                <a:latin typeface="Arial"/>
+              </a:rPr>
+              <a:t>1e-04</a:t>
+            </a:r>
+          </a:p>
+        </p:txBody>
+      </p:sp>
+      <p:cxnSp>
+        <p:nvCxnSpPr>
+          <p:cNvPr id="47" name="C2-E09 line 45" descr="sci-ppt:o045"/>
+          <p:cNvCxnSpPr/>
+          <p:nvPr/>
+        </p:nvCxnSpPr>
+        <p:spPr>
+          <a:xfrm>
+            <a:off x="6702552" y="5029200"/>
+            <a:ext cx="64008" cy="0"/>
+          </a:xfrm>
+          <a:prstGeom prst="line">
+            <a:avLst/>
+          </a:prstGeom>
+          <a:ln w="12700">
+            <a:solidFill>
+              <a:srgbClr val="B4C7D2"/>
+            </a:solidFill>
+          </a:ln>
+          <a:effectLst/>
+        </p:spPr>
+      </p:cxnSp>
+      <p:cxnSp>
+        <p:nvCxnSpPr>
+          <p:cNvPr id="48" name="C2-E09 line 46" descr="sci-ppt:o046"/>
+          <p:cNvCxnSpPr/>
+          <p:nvPr/>
+        </p:nvCxnSpPr>
+        <p:spPr>
+          <a:xfrm>
+            <a:off x="6702552" y="3566160"/>
+            <a:ext cx="64008" cy="0"/>
+          </a:xfrm>
+          <a:prstGeom prst="line">
+            <a:avLst/>
+          </a:prstGeom>
+          <a:ln w="12700">
+            <a:solidFill>
+              <a:srgbClr val="B4C7D2"/>
+            </a:solidFill>
+          </a:ln>
+          <a:effectLst/>
+        </p:spPr>
+      </p:cxnSp>
+      <p:cxnSp>
+        <p:nvCxnSpPr>
+          <p:cNvPr id="49" name="C2-E09 line 47" descr="sci-ppt:o047"/>
+          <p:cNvCxnSpPr/>
+          <p:nvPr/>
+        </p:nvCxnSpPr>
+        <p:spPr>
+          <a:xfrm>
+            <a:off x="6766560" y="3566160"/>
+            <a:ext cx="5029200" cy="0"/>
+          </a:xfrm>
+          <a:prstGeom prst="line">
+            <a:avLst/>
+          </a:prstGeom>
+          <a:ln w="7620">
+            <a:solidFill>
+              <a:srgbClr val="2E4756"/>
+            </a:solidFill>
+          </a:ln>
+          <a:effectLst/>
+        </p:spPr>
+      </p:cxnSp>
+      <p:sp>
+        <p:nvSpPr>
+          <p:cNvPr id="50" name="C2-E09 text 48" descr="sci-ppt:o048"/>
+          <p:cNvSpPr txBox="1"/>
+          <p:nvPr/>
+        </p:nvSpPr>
+        <p:spPr>
+          <a:xfrm>
+            <a:off x="5897880" y="3483864"/>
+            <a:ext cx="777240" cy="208407"/>
+          </a:xfrm>
+          <a:prstGeom prst="rect">
+            <a:avLst/>
+          </a:prstGeom>
+          <a:noFill/>
+          <a:effectLst/>
+        </p:spPr>
+        <p:txBody>
+          <a:bodyPr wrap="none" lIns="18288" rIns="18288" tIns="18288" bIns="18288" anchor="t">
+            <a:spAutoFit/>
+          </a:bodyPr>
+          <a:lstStyle/>
+          <a:p>
+            <a:pPr algn="r">
+              <a:spcAft>
+                <a:spcPts val="0"/>
+              </a:spcAft>
+            </a:pPr>
+            <a:r>
+              <a:rPr sz="1050" b="0" i="0">
+                <a:solidFill>
+                  <a:srgbClr val="B4C7D2"/>
+                </a:solidFill>
+                <a:latin typeface="Arial"/>
+              </a:rPr>
+              <a:t>1e-05</a:t>
+            </a:r>
+          </a:p>
+        </p:txBody>
+      </p:sp>
+      <p:cxnSp>
+        <p:nvCxnSpPr>
+          <p:cNvPr id="51" name="C2-E09 line 49" descr="sci-ppt:o049"/>
+          <p:cNvCxnSpPr/>
+          <p:nvPr/>
+        </p:nvCxnSpPr>
+        <p:spPr>
+          <a:xfrm>
+            <a:off x="6702552" y="2103120"/>
+            <a:ext cx="64008" cy="0"/>
+          </a:xfrm>
+          <a:prstGeom prst="line">
+            <a:avLst/>
+          </a:prstGeom>
+          <a:ln w="12700">
+            <a:solidFill>
+              <a:srgbClr val="B4C7D2"/>
+            </a:solidFill>
+          </a:ln>
+          <a:effectLst/>
+        </p:spPr>
+      </p:cxnSp>
+      <p:cxnSp>
+        <p:nvCxnSpPr>
+          <p:cNvPr id="52" name="C2-E09 line 50" descr="sci-ppt:o050"/>
+          <p:cNvCxnSpPr/>
+          <p:nvPr/>
+        </p:nvCxnSpPr>
+        <p:spPr>
+          <a:xfrm>
+            <a:off x="6766560" y="2103120"/>
+            <a:ext cx="5029200" cy="0"/>
+          </a:xfrm>
+          <a:prstGeom prst="line">
+            <a:avLst/>
+          </a:prstGeom>
+          <a:ln w="7620">
+            <a:solidFill>
+              <a:srgbClr val="2E4756"/>
+            </a:solidFill>
+          </a:ln>
+          <a:effectLst/>
+        </p:spPr>
+      </p:cxnSp>
+      <p:sp>
+        <p:nvSpPr>
+          <p:cNvPr id="53" name="C2-E09 text 51" descr="sci-ppt:o051"/>
+          <p:cNvSpPr txBox="1"/>
+          <p:nvPr/>
+        </p:nvSpPr>
+        <p:spPr>
+          <a:xfrm>
+            <a:off x="5897880" y="2020824"/>
+            <a:ext cx="777240" cy="208407"/>
+          </a:xfrm>
+          <a:prstGeom prst="rect">
+            <a:avLst/>
+          </a:prstGeom>
+          <a:noFill/>
+          <a:effectLst/>
+        </p:spPr>
+        <p:txBody>
+          <a:bodyPr wrap="none" lIns="18288" rIns="18288" tIns="18288" bIns="18288" anchor="t">
+            <a:spAutoFit/>
+          </a:bodyPr>
+          <a:lstStyle/>
+          <a:p>
+            <a:pPr algn="r">
+              <a:spcAft>
+                <a:spcPts val="0"/>
+              </a:spcAft>
+            </a:pPr>
+            <a:r>
+              <a:rPr sz="1050" b="0" i="0">
+                <a:solidFill>
+                  <a:srgbClr val="B4C7D2"/>
+                </a:solidFill>
+                <a:latin typeface="Arial"/>
+              </a:rPr>
+              <a:t>1e-01</a:t>
+            </a:r>
+          </a:p>
+        </p:txBody>
+      </p:sp>
+      <p:sp>
+        <p:nvSpPr>
+          <p:cNvPr id="54" name="C2-E09 text 52" descr="sci-ppt:o052"/>
+          <p:cNvSpPr txBox="1"/>
+          <p:nvPr/>
+        </p:nvSpPr>
+        <p:spPr>
+          <a:xfrm>
+            <a:off x="6766560" y="5312664"/>
+            <a:ext cx="5029200" cy="231648"/>
+          </a:xfrm>
+          <a:prstGeom prst="rect">
+            <a:avLst/>
+          </a:prstGeom>
+          <a:noFill/>
+          <a:effectLst/>
+        </p:spPr>
+        <p:txBody>
+          <a:bodyPr wrap="none" lIns="18288" rIns="18288" tIns="18288" bIns="18288" anchor="t">
+            <a:spAutoFit/>
+          </a:bodyPr>
+          <a:lstStyle/>
+          <a:p>
+            <a:pPr algn="ctr">
+              <a:spcAft>
+                <a:spcPts val="0"/>
+              </a:spcAft>
+            </a:pPr>
+            <a:r>
+              <a:rPr sz="1200" b="0" i="0">
                 <a:solidFill>
                   <a:srgbClr val="E7F0F3"/>
                 </a:solidFill>
                 <a:latin typeface="Arial"/>
               </a:rPr>
-              <a:t>PFC / side B</a:t>
-            </a:r>
-          </a:p>
-        </p:txBody>
-      </p:sp>
-      <p:cxnSp>
-        <p:nvCxnSpPr>
-          <p:cNvPr id="7" name="arrow6" descr="sci-ppt:C2-E09-006"/>
-          <p:cNvCxnSpPr/>
-          <p:nvPr/>
-        </p:nvCxnSpPr>
-        <p:spPr>
-          <a:xfrm>
-            <a:off x="3048000" y="2865120"/>
-            <a:ext cx="3291840" cy="0"/>
-          </a:xfrm>
-          <a:prstGeom prst="line">
-            <a:avLst/>
-          </a:prstGeom>
-          <a:ln w="25400">
-            <a:solidFill>
-              <a:srgbClr val="8EDBD4"/>
-            </a:solidFill>
-            <a:headEnd type="none" w="med" len="med"/>
-            <a:tailEnd type="triangle" w="med" len="med"/>
-          </a:ln>
-          <a:effectLst/>
-        </p:spPr>
-      </p:cxnSp>
-      <p:sp>
-        <p:nvSpPr>
-          <p:cNvPr id="8" name="text7" descr="sci-ppt:C2-E09-007"/>
+              <a:t>distance Lₕ  (m)</a:t>
+            </a:r>
+          </a:p>
+        </p:txBody>
+      </p:sp>
+      <p:sp>
+        <p:nvSpPr>
+          <p:cNvPr id="55" name="C2-E09 text 53" descr="sci-ppt:o053"/>
           <p:cNvSpPr txBox="1"/>
           <p:nvPr/>
         </p:nvSpPr>
         <p:spPr>
           <a:xfrm>
-            <a:off x="4632960" y="3169920"/>
-            <a:ext cx="4876800" cy="359054"/>
+            <a:off x="6217920" y="1024128"/>
+            <a:ext cx="5029200" cy="231648"/>
           </a:xfrm>
           <a:prstGeom prst="rect">
             <a:avLst/>
@@ -3322,7 +4948,7 @@
           <a:effectLst/>
         </p:spPr>
         <p:txBody>
-          <a:bodyPr wrap="none" lIns="27432" rIns="27432" tIns="18288" bIns="18288" anchor="ctr">
+          <a:bodyPr wrap="none" lIns="18288" rIns="18288" tIns="18288" bIns="18288" anchor="t">
             <a:spAutoFit/>
           </a:bodyPr>
           <a:lstStyle/>
@@ -3333,27 +4959,397 @@
               </a:spcAft>
             </a:pPr>
             <a:r>
-              <a:rPr sz="1823" b="0" i="0">
+              <a:rPr sz="1200" b="0" i="0">
                 <a:solidFill>
                   <a:srgbClr val="E7F0F3"/>
                 </a:solidFill>
                 <a:latin typeface="Arial"/>
               </a:rPr>
-              <a:t>q; normal A → B</a:t>
-            </a:r>
-          </a:p>
-        </p:txBody>
-      </p:sp>
-      <p:sp>
-        <p:nvSpPr>
-          <p:cNvPr id="9" name="text8" descr="sci-ppt:C2-E09-008"/>
+              <a:t>diffusion time tₜₕ  (s)</a:t>
+            </a:r>
+          </a:p>
+        </p:txBody>
+      </p:sp>
+      <p:sp>
+        <p:nvSpPr>
+          <p:cNvPr id="56" name="C2-E09 polygon 54" descr="sci-ppt:o054"/>
+          <p:cNvSpPr/>
+          <p:nvPr/>
+        </p:nvSpPr>
+        <p:spPr>
+          <a:xfrm>
+            <a:off x="6766560" y="1982859"/>
+            <a:ext cx="5029200" cy="2926080"/>
+          </a:xfrm>
+          <a:custGeom>
+            <a:avLst/>
+            <a:gdLst/>
+            <a:ahLst/>
+            <a:cxnLst/>
+            <a:rect l="l" t="t" r="r" b="b"/>
+            <a:pathLst>
+              <a:path w="5029200" h="2926080">
+                <a:moveTo>
+                  <a:pt x="0" y="2926080"/>
+                </a:moveTo>
+                <a:lnTo>
+                  <a:pt x="50800" y="2896524"/>
+                </a:lnTo>
+                <a:lnTo>
+                  <a:pt x="101600" y="2866968"/>
+                </a:lnTo>
+                <a:lnTo>
+                  <a:pt x="152400" y="2837411"/>
+                </a:lnTo>
+                <a:lnTo>
+                  <a:pt x="203200" y="2807855"/>
+                </a:lnTo>
+                <a:lnTo>
+                  <a:pt x="254000" y="2778298"/>
+                </a:lnTo>
+                <a:lnTo>
+                  <a:pt x="304800" y="2748742"/>
+                </a:lnTo>
+                <a:lnTo>
+                  <a:pt x="355600" y="2719186"/>
+                </a:lnTo>
+                <a:lnTo>
+                  <a:pt x="406400" y="2689629"/>
+                </a:lnTo>
+                <a:lnTo>
+                  <a:pt x="457200" y="2660073"/>
+                </a:lnTo>
+                <a:lnTo>
+                  <a:pt x="508000" y="2630517"/>
+                </a:lnTo>
+                <a:lnTo>
+                  <a:pt x="558800" y="2600960"/>
+                </a:lnTo>
+                <a:lnTo>
+                  <a:pt x="609600" y="2571404"/>
+                </a:lnTo>
+                <a:lnTo>
+                  <a:pt x="660400" y="2541848"/>
+                </a:lnTo>
+                <a:lnTo>
+                  <a:pt x="711200" y="2512291"/>
+                </a:lnTo>
+                <a:lnTo>
+                  <a:pt x="762000" y="2482735"/>
+                </a:lnTo>
+                <a:lnTo>
+                  <a:pt x="812800" y="2453178"/>
+                </a:lnTo>
+                <a:lnTo>
+                  <a:pt x="863600" y="2423622"/>
+                </a:lnTo>
+                <a:lnTo>
+                  <a:pt x="914400" y="2394066"/>
+                </a:lnTo>
+                <a:lnTo>
+                  <a:pt x="965200" y="2364509"/>
+                </a:lnTo>
+                <a:lnTo>
+                  <a:pt x="1016000" y="2334953"/>
+                </a:lnTo>
+                <a:lnTo>
+                  <a:pt x="1066800" y="2305397"/>
+                </a:lnTo>
+                <a:lnTo>
+                  <a:pt x="1117600" y="2275840"/>
+                </a:lnTo>
+                <a:lnTo>
+                  <a:pt x="1168399" y="2246284"/>
+                </a:lnTo>
+                <a:lnTo>
+                  <a:pt x="1219200" y="2216728"/>
+                </a:lnTo>
+                <a:lnTo>
+                  <a:pt x="1270000" y="2187171"/>
+                </a:lnTo>
+                <a:lnTo>
+                  <a:pt x="1320800" y="2157615"/>
+                </a:lnTo>
+                <a:lnTo>
+                  <a:pt x="1371600" y="2128058"/>
+                </a:lnTo>
+                <a:lnTo>
+                  <a:pt x="1422400" y="2098502"/>
+                </a:lnTo>
+                <a:lnTo>
+                  <a:pt x="1473200" y="2068946"/>
+                </a:lnTo>
+                <a:lnTo>
+                  <a:pt x="1524000" y="2039389"/>
+                </a:lnTo>
+                <a:lnTo>
+                  <a:pt x="1574800" y="2009833"/>
+                </a:lnTo>
+                <a:lnTo>
+                  <a:pt x="1625600" y="1980277"/>
+                </a:lnTo>
+                <a:lnTo>
+                  <a:pt x="1676400" y="1950720"/>
+                </a:lnTo>
+                <a:lnTo>
+                  <a:pt x="1727200" y="1921164"/>
+                </a:lnTo>
+                <a:lnTo>
+                  <a:pt x="1778000" y="1891608"/>
+                </a:lnTo>
+                <a:lnTo>
+                  <a:pt x="1828800" y="1862051"/>
+                </a:lnTo>
+                <a:lnTo>
+                  <a:pt x="1879600" y="1832495"/>
+                </a:lnTo>
+                <a:lnTo>
+                  <a:pt x="1930400" y="1802938"/>
+                </a:lnTo>
+                <a:lnTo>
+                  <a:pt x="1981200" y="1773382"/>
+                </a:lnTo>
+                <a:lnTo>
+                  <a:pt x="2032000" y="1743826"/>
+                </a:lnTo>
+                <a:lnTo>
+                  <a:pt x="2082800" y="1714269"/>
+                </a:lnTo>
+                <a:lnTo>
+                  <a:pt x="2133600" y="1684713"/>
+                </a:lnTo>
+                <a:lnTo>
+                  <a:pt x="2184399" y="1655157"/>
+                </a:lnTo>
+                <a:lnTo>
+                  <a:pt x="2235200" y="1625600"/>
+                </a:lnTo>
+                <a:lnTo>
+                  <a:pt x="2286000" y="1596044"/>
+                </a:lnTo>
+                <a:lnTo>
+                  <a:pt x="2336800" y="1566488"/>
+                </a:lnTo>
+                <a:lnTo>
+                  <a:pt x="2387600" y="1536931"/>
+                </a:lnTo>
+                <a:lnTo>
+                  <a:pt x="2438400" y="1507375"/>
+                </a:lnTo>
+                <a:lnTo>
+                  <a:pt x="2489200" y="1477818"/>
+                </a:lnTo>
+                <a:lnTo>
+                  <a:pt x="2540000" y="1448262"/>
+                </a:lnTo>
+                <a:lnTo>
+                  <a:pt x="2590800" y="1418706"/>
+                </a:lnTo>
+                <a:lnTo>
+                  <a:pt x="2641600" y="1389149"/>
+                </a:lnTo>
+                <a:lnTo>
+                  <a:pt x="2692400" y="1359593"/>
+                </a:lnTo>
+                <a:lnTo>
+                  <a:pt x="2743200" y="1330037"/>
+                </a:lnTo>
+                <a:lnTo>
+                  <a:pt x="2794000" y="1300480"/>
+                </a:lnTo>
+                <a:lnTo>
+                  <a:pt x="2844800" y="1270924"/>
+                </a:lnTo>
+                <a:lnTo>
+                  <a:pt x="2895600" y="1241368"/>
+                </a:lnTo>
+                <a:lnTo>
+                  <a:pt x="2946400" y="1211811"/>
+                </a:lnTo>
+                <a:lnTo>
+                  <a:pt x="2997200" y="1182255"/>
+                </a:lnTo>
+                <a:lnTo>
+                  <a:pt x="3048000" y="1152698"/>
+                </a:lnTo>
+                <a:lnTo>
+                  <a:pt x="3098800" y="1123142"/>
+                </a:lnTo>
+                <a:lnTo>
+                  <a:pt x="3149600" y="1093586"/>
+                </a:lnTo>
+                <a:lnTo>
+                  <a:pt x="3200400" y="1064029"/>
+                </a:lnTo>
+                <a:lnTo>
+                  <a:pt x="3251200" y="1034473"/>
+                </a:lnTo>
+                <a:lnTo>
+                  <a:pt x="3302000" y="1004917"/>
+                </a:lnTo>
+                <a:lnTo>
+                  <a:pt x="3352800" y="975360"/>
+                </a:lnTo>
+                <a:lnTo>
+                  <a:pt x="3403600" y="945804"/>
+                </a:lnTo>
+                <a:lnTo>
+                  <a:pt x="3454400" y="916248"/>
+                </a:lnTo>
+                <a:lnTo>
+                  <a:pt x="3505200" y="886691"/>
+                </a:lnTo>
+                <a:lnTo>
+                  <a:pt x="3556000" y="857135"/>
+                </a:lnTo>
+                <a:lnTo>
+                  <a:pt x="3606800" y="827578"/>
+                </a:lnTo>
+                <a:lnTo>
+                  <a:pt x="3657600" y="798022"/>
+                </a:lnTo>
+                <a:lnTo>
+                  <a:pt x="3708400" y="768466"/>
+                </a:lnTo>
+                <a:lnTo>
+                  <a:pt x="3759200" y="738909"/>
+                </a:lnTo>
+                <a:lnTo>
+                  <a:pt x="3810000" y="709353"/>
+                </a:lnTo>
+                <a:lnTo>
+                  <a:pt x="3860800" y="679797"/>
+                </a:lnTo>
+                <a:lnTo>
+                  <a:pt x="3911600" y="650240"/>
+                </a:lnTo>
+                <a:lnTo>
+                  <a:pt x="3962400" y="620684"/>
+                </a:lnTo>
+                <a:lnTo>
+                  <a:pt x="4013200" y="591128"/>
+                </a:lnTo>
+                <a:lnTo>
+                  <a:pt x="4064000" y="561571"/>
+                </a:lnTo>
+                <a:lnTo>
+                  <a:pt x="4114800" y="532015"/>
+                </a:lnTo>
+                <a:lnTo>
+                  <a:pt x="4165600" y="502458"/>
+                </a:lnTo>
+                <a:lnTo>
+                  <a:pt x="4216400" y="472902"/>
+                </a:lnTo>
+                <a:lnTo>
+                  <a:pt x="4267200" y="443346"/>
+                </a:lnTo>
+                <a:lnTo>
+                  <a:pt x="4318000" y="413789"/>
+                </a:lnTo>
+                <a:lnTo>
+                  <a:pt x="4368800" y="384233"/>
+                </a:lnTo>
+                <a:lnTo>
+                  <a:pt x="4419600" y="354677"/>
+                </a:lnTo>
+                <a:lnTo>
+                  <a:pt x="4470399" y="325120"/>
+                </a:lnTo>
+                <a:lnTo>
+                  <a:pt x="4521200" y="295564"/>
+                </a:lnTo>
+                <a:lnTo>
+                  <a:pt x="4572000" y="266008"/>
+                </a:lnTo>
+                <a:lnTo>
+                  <a:pt x="4622800" y="236451"/>
+                </a:lnTo>
+                <a:lnTo>
+                  <a:pt x="4673600" y="206895"/>
+                </a:lnTo>
+                <a:lnTo>
+                  <a:pt x="4724400" y="177338"/>
+                </a:lnTo>
+                <a:lnTo>
+                  <a:pt x="4775200" y="147782"/>
+                </a:lnTo>
+                <a:lnTo>
+                  <a:pt x="4826000" y="118226"/>
+                </a:lnTo>
+                <a:lnTo>
+                  <a:pt x="4876800" y="88669"/>
+                </a:lnTo>
+                <a:lnTo>
+                  <a:pt x="4927600" y="59113"/>
+                </a:lnTo>
+                <a:lnTo>
+                  <a:pt x="4978400" y="29557"/>
+                </a:lnTo>
+                <a:lnTo>
+                  <a:pt x="5029200" y="0"/>
+                </a:lnTo>
+              </a:path>
+            </a:pathLst>
+          </a:custGeom>
+          <a:noFill/>
+          <a:ln w="38100">
+            <a:solidFill>
+              <a:srgbClr val="F2B880"/>
+            </a:solidFill>
+          </a:ln>
+          <a:effectLst/>
+        </p:spPr>
+        <p:txBody>
+          <a:bodyPr rtlCol="0" anchor="ctr"/>
+          <a:lstStyle/>
+          <a:p>
+            <a:pPr algn="ctr"/>
+          </a:p>
+        </p:txBody>
+      </p:sp>
+      <p:sp>
+        <p:nvSpPr>
+          <p:cNvPr id="57" name="C2-E09 ellipse 55" descr="sci-ppt:o055"/>
+          <p:cNvSpPr/>
+          <p:nvPr/>
+        </p:nvSpPr>
+        <p:spPr>
+          <a:xfrm>
+            <a:off x="10086822" y="2861437"/>
+            <a:ext cx="146304" cy="146304"/>
+          </a:xfrm>
+          <a:prstGeom prst="ellipse">
+            <a:avLst/>
+          </a:prstGeom>
+          <a:solidFill>
+            <a:srgbClr val="8EDBD4"/>
+          </a:solidFill>
+          <a:ln w="12700">
+            <a:solidFill>
+              <a:srgbClr val="8EDBD4"/>
+            </a:solidFill>
+          </a:ln>
+          <a:effectLst/>
+        </p:spPr>
+        <p:txBody>
+          <a:bodyPr rtlCol="0" anchor="ctr"/>
+          <a:lstStyle/>
+          <a:p>
+            <a:pPr algn="ctr"/>
+          </a:p>
+        </p:txBody>
+      </p:sp>
+      <p:sp>
+        <p:nvSpPr>
+          <p:cNvPr id="58" name="C2-E09 text 56" descr="sci-ppt:o056"/>
           <p:cNvSpPr txBox="1"/>
           <p:nvPr/>
         </p:nvSpPr>
         <p:spPr>
           <a:xfrm>
-            <a:off x="1219200" y="1097280"/>
-            <a:ext cx="1828800" cy="377952"/>
+            <a:off x="7599654" y="2477389"/>
+            <a:ext cx="2377440" cy="231648"/>
           </a:xfrm>
           <a:prstGeom prst="rect">
             <a:avLst/>
@@ -3362,7 +5358,7 @@
           <a:effectLst/>
         </p:spPr>
         <p:txBody>
-          <a:bodyPr wrap="none" lIns="27432" rIns="27432" tIns="18288" bIns="18288" anchor="ctr">
+          <a:bodyPr wrap="none" lIns="18288" rIns="18288" tIns="18288" bIns="18288" anchor="t">
             <a:spAutoFit/>
           </a:bodyPr>
           <a:lstStyle/>
@@ -3373,39 +5369,95 @@
               </a:spcAft>
             </a:pPr>
             <a:r>
-              <a:rPr sz="1920" b="0" i="0">
+              <a:rPr sz="1200" b="0" i="0">
+                <a:solidFill>
+                  <a:srgbClr val="8EDBD4"/>
+                </a:solidFill>
+                <a:latin typeface="Arial"/>
+              </a:rPr>
+              <a:t>tₜₕ ≈ 0.53 ms to cross 5 µm</a:t>
+            </a:r>
+          </a:p>
+        </p:txBody>
+      </p:sp>
+      <p:sp>
+        <p:nvSpPr>
+          <p:cNvPr id="59" name="C2-E09 text 57" descr="sci-ppt:o057"/>
+          <p:cNvSpPr txBox="1"/>
+          <p:nvPr/>
+        </p:nvSpPr>
+        <p:spPr>
+          <a:xfrm>
+            <a:off x="7218197" y="3840480"/>
+            <a:ext cx="2194560" cy="247142"/>
+          </a:xfrm>
+          <a:prstGeom prst="rect">
+            <a:avLst/>
+          </a:prstGeom>
+          <a:noFill/>
+          <a:effectLst/>
+        </p:spPr>
+        <p:txBody>
+          <a:bodyPr wrap="none" lIns="18288" rIns="18288" tIns="18288" bIns="18288" anchor="t">
+            <a:spAutoFit/>
+          </a:bodyPr>
+          <a:lstStyle/>
+          <a:p>
+            <a:pPr algn="l">
+              <a:spcAft>
+                <a:spcPts val="0"/>
+              </a:spcAft>
+            </a:pPr>
+            <a:r>
+              <a:rPr sz="1300" b="0" i="0">
+                <a:solidFill>
+                  <a:srgbClr val="F2B880"/>
+                </a:solidFill>
+                <a:latin typeface="Arial"/>
+              </a:rPr>
+              <a:t>tₜₕ ~ Lₕ²/α</a:t>
+            </a:r>
+          </a:p>
+        </p:txBody>
+      </p:sp>
+      <p:sp>
+        <p:nvSpPr>
+          <p:cNvPr id="60" name="C2-E09 text 58" descr="sci-ppt:o058"/>
+          <p:cNvSpPr txBox="1"/>
+          <p:nvPr/>
+        </p:nvSpPr>
+        <p:spPr>
+          <a:xfrm>
+            <a:off x="914400" y="5733288"/>
+            <a:ext cx="10972800" cy="433070"/>
+          </a:xfrm>
+          <a:prstGeom prst="rect">
+            <a:avLst/>
+          </a:prstGeom>
+          <a:noFill/>
+          <a:effectLst/>
+        </p:spPr>
+        <p:txBody>
+          <a:bodyPr wrap="none" lIns="18288" rIns="18288" tIns="18288" bIns="18288" anchor="t">
+            <a:spAutoFit/>
+          </a:bodyPr>
+          <a:lstStyle/>
+          <a:p>
+            <a:pPr algn="l">
+              <a:spcAft>
+                <a:spcPts val="0"/>
+              </a:spcAft>
+            </a:pPr>
+            <a:r>
+              <a:rPr sz="1250" b="0" i="0">
                 <a:solidFill>
                   <a:srgbClr val="E7F0F3"/>
                 </a:solidFill>
                 <a:latin typeface="Arial"/>
               </a:rPr>
-              <a:t>T_A</a:t>
-            </a:r>
-          </a:p>
-        </p:txBody>
-      </p:sp>
-      <p:sp>
-        <p:nvSpPr>
-          <p:cNvPr id="10" name="text9" descr="sci-ppt:C2-E09-009"/>
-          <p:cNvSpPr txBox="1"/>
-          <p:nvPr/>
-        </p:nvSpPr>
-        <p:spPr>
-          <a:xfrm>
-            <a:off x="7071360" y="1097280"/>
-            <a:ext cx="1828800" cy="377952"/>
-          </a:xfrm>
-          <a:prstGeom prst="rect">
-            <a:avLst/>
-          </a:prstGeom>
-          <a:noFill/>
-          <a:effectLst/>
-        </p:spPr>
-        <p:txBody>
-          <a:bodyPr wrap="none" lIns="27432" rIns="27432" tIns="18288" bIns="18288" anchor="ctr">
-            <a:spAutoFit/>
-          </a:bodyPr>
-          <a:lstStyle/>
+              <a:t>α = k/(ρcₚ) = 4.69×10⁻⁸ m²/s for the PFC liquid.  Heat travels a distance δ in a time ~ δ²/α, so doubling δ costs four times as</a:t>
+            </a:r>
+          </a:p>
           <a:p>
             <a:pPr algn="l">
               <a:spcAft>
@@ -3413,27 +5465,27 @@
               </a:spcAft>
             </a:pPr>
             <a:r>
-              <a:rPr sz="1920" b="0" i="0">
+              <a:rPr sz="1250" b="0" i="0">
                 <a:solidFill>
                   <a:srgbClr val="E7F0F3"/>
                 </a:solidFill>
                 <a:latin typeface="Arial"/>
               </a:rPr>
-              <a:t>T_B</a:t>
-            </a:r>
-          </a:p>
-        </p:txBody>
-      </p:sp>
-      <p:sp>
-        <p:nvSpPr>
-          <p:cNvPr id="11" name="text10" descr="sci-ppt:C2-E09-010"/>
+              <a:t>long.</a:t>
+            </a:r>
+          </a:p>
+        </p:txBody>
+      </p:sp>
+      <p:sp>
+        <p:nvSpPr>
+          <p:cNvPr id="61" name="C2-E09 text 59" descr="sci-ppt:o059"/>
           <p:cNvSpPr txBox="1"/>
           <p:nvPr/>
         </p:nvSpPr>
         <p:spPr>
           <a:xfrm>
-            <a:off x="1402080" y="4206240"/>
-            <a:ext cx="10363200" cy="340156"/>
+            <a:off x="320040" y="6510528"/>
+            <a:ext cx="11521440" cy="200660"/>
           </a:xfrm>
           <a:prstGeom prst="rect">
             <a:avLst/>
@@ -3442,7 +5494,7 @@
           <a:effectLst/>
         </p:spPr>
         <p:txBody>
-          <a:bodyPr wrap="none" lIns="27432" rIns="27432" tIns="18288" bIns="18288" anchor="ctr">
+          <a:bodyPr wrap="none" lIns="18288" rIns="18288" tIns="18288" bIns="18288" anchor="t">
             <a:spAutoFit/>
           </a:bodyPr>
           <a:lstStyle/>
@@ -3453,443 +5505,13 @@
               </a:spcAft>
             </a:pPr>
             <a:r>
-              <a:rPr sz="1728" b="0" i="0">
-                <a:solidFill>
-                  <a:srgbClr val="E7F0F3"/>
-                </a:solidFill>
-                <a:latin typeface="Arial"/>
-              </a:rPr>
-              <a:t>Thermal path and contact are distinct from optical deposition.</a:t>
-            </a:r>
-          </a:p>
-        </p:txBody>
-      </p:sp>
-      <p:sp>
-        <p:nvSpPr>
-          <p:cNvPr id="12" name="rect11" descr="sci-ppt:C2-E09-011"/>
-          <p:cNvSpPr/>
-          <p:nvPr/>
-        </p:nvSpPr>
-        <p:spPr>
-          <a:xfrm>
-            <a:off x="4279392" y="1536192"/>
-            <a:ext cx="219456" cy="2414016"/>
-          </a:xfrm>
-          <a:prstGeom prst="rect">
-            <a:avLst/>
-          </a:prstGeom>
-          <a:solidFill>
-            <a:srgbClr val="F6BC77"/>
-          </a:solidFill>
-          <a:ln>
-            <a:noFill/>
-          </a:ln>
-          <a:effectLst/>
-        </p:spPr>
-        <p:txBody>
-          <a:bodyPr rtlCol="0" anchor="ctr"/>
-          <a:lstStyle/>
-          <a:p>
-            <a:pPr algn="ctr"/>
-          </a:p>
-        </p:txBody>
-      </p:sp>
-      <p:sp>
-        <p:nvSpPr>
-          <p:cNvPr id="13" name="text12" descr="sci-ppt:C2-E09-012"/>
-          <p:cNvSpPr txBox="1"/>
-          <p:nvPr/>
-        </p:nvSpPr>
-        <p:spPr>
-          <a:xfrm>
-            <a:off x="9387840" y="2438400"/>
-            <a:ext cx="1950720" cy="340156"/>
-          </a:xfrm>
-          <a:prstGeom prst="rect">
-            <a:avLst/>
-          </a:prstGeom>
-          <a:noFill/>
-          <a:effectLst/>
-        </p:spPr>
-        <p:txBody>
-          <a:bodyPr wrap="none" lIns="27432" rIns="27432" tIns="18288" bIns="18288" anchor="ctr">
-            <a:spAutoFit/>
-          </a:bodyPr>
-          <a:lstStyle/>
-          <a:p>
-            <a:pPr algn="l">
-              <a:spcAft>
-                <a:spcPts val="0"/>
-              </a:spcAft>
-            </a:pPr>
-            <a:r>
-              <a:rPr sz="1728" b="0" i="0">
-                <a:solidFill>
-                  <a:srgbClr val="E7F0F3"/>
-                </a:solidFill>
-                <a:latin typeface="Arial"/>
-              </a:rPr>
-              <a:t>δ_T</a:t>
-            </a:r>
-          </a:p>
-        </p:txBody>
-      </p:sp>
-      <p:sp>
-        <p:nvSpPr>
-          <p:cNvPr id="14" name="text13" descr="sci-ppt:C2-E09-013"/>
-          <p:cNvSpPr txBox="1"/>
-          <p:nvPr/>
-        </p:nvSpPr>
-        <p:spPr>
-          <a:xfrm>
-            <a:off x="9387840" y="2865120"/>
-            <a:ext cx="1950720" cy="340156"/>
-          </a:xfrm>
-          <a:prstGeom prst="rect">
-            <a:avLst/>
-          </a:prstGeom>
-          <a:noFill/>
-          <a:effectLst/>
-        </p:spPr>
-        <p:txBody>
-          <a:bodyPr wrap="none" lIns="27432" rIns="27432" tIns="18288" bIns="18288" anchor="ctr">
-            <a:spAutoFit/>
-          </a:bodyPr>
-          <a:lstStyle/>
-          <a:p>
-            <a:pPr algn="l">
-              <a:spcAft>
-                <a:spcPts val="0"/>
-              </a:spcAft>
-            </a:pPr>
-            <a:r>
-              <a:rPr sz="1728" b="0" i="0">
-                <a:solidFill>
-                  <a:srgbClr val="E7F0F3"/>
-                </a:solidFill>
-                <a:latin typeface="Arial"/>
-              </a:rPr>
-              <a:t>≪ L_h</a:t>
-            </a:r>
-          </a:p>
-        </p:txBody>
-      </p:sp>
-      <p:sp>
-        <p:nvSpPr>
-          <p:cNvPr id="15" name="text14" descr="sci-ppt:C2-E09-014"/>
-          <p:cNvSpPr txBox="1"/>
-          <p:nvPr/>
-        </p:nvSpPr>
-        <p:spPr>
-          <a:xfrm>
-            <a:off x="365760" y="4974336"/>
-            <a:ext cx="5547360" cy="321259"/>
-          </a:xfrm>
-          <a:prstGeom prst="rect">
-            <a:avLst/>
-          </a:prstGeom>
-          <a:noFill/>
-          <a:effectLst/>
-        </p:spPr>
-        <p:txBody>
-          <a:bodyPr wrap="none" lIns="27432" rIns="27432" tIns="18288" bIns="18288" anchor="ctr">
-            <a:spAutoFit/>
-          </a:bodyPr>
-          <a:lstStyle/>
-          <a:p>
-            <a:pPr algn="l">
-              <a:spcAft>
-                <a:spcPts val="0"/>
-              </a:spcAft>
-            </a:pPr>
-            <a:r>
-              <a:rPr sz="1632" b="0" i="0">
-                <a:solidFill>
-                  <a:srgbClr val="E7F0F3"/>
-                </a:solidFill>
-                <a:latin typeface="Arial"/>
-              </a:rPr>
-              <a:t>L_h: absorber-to-core heating distance</a:t>
-            </a:r>
-          </a:p>
-        </p:txBody>
-      </p:sp>
-      <p:sp>
-        <p:nvSpPr>
-          <p:cNvPr id="16" name="text15" descr="sci-ppt:C2-E09-015"/>
-          <p:cNvSpPr txBox="1"/>
-          <p:nvPr/>
-        </p:nvSpPr>
-        <p:spPr>
-          <a:xfrm>
-            <a:off x="365760" y="5266944"/>
-            <a:ext cx="5547360" cy="321259"/>
-          </a:xfrm>
-          <a:prstGeom prst="rect">
-            <a:avLst/>
-          </a:prstGeom>
-          <a:noFill/>
-          <a:effectLst/>
-        </p:spPr>
-        <p:txBody>
-          <a:bodyPr wrap="none" lIns="27432" rIns="27432" tIns="18288" bIns="18288" anchor="ctr">
-            <a:spAutoFit/>
-          </a:bodyPr>
-          <a:lstStyle/>
-          <a:p>
-            <a:pPr algn="l">
-              <a:spcAft>
-                <a:spcPts val="0"/>
-              </a:spcAft>
-            </a:pPr>
-            <a:r>
-              <a:rPr sz="1632" b="0" i="0">
-                <a:solidFill>
-                  <a:srgbClr val="E7F0F3"/>
-                </a:solidFill>
-                <a:latin typeface="Arial"/>
-              </a:rPr>
-              <a:t>α = k/(ρc_p)</a:t>
-            </a:r>
-          </a:p>
-        </p:txBody>
-      </p:sp>
-      <p:sp>
-        <p:nvSpPr>
-          <p:cNvPr id="17" name="text16" descr="sci-ppt:C2-E09-016"/>
-          <p:cNvSpPr txBox="1"/>
-          <p:nvPr/>
-        </p:nvSpPr>
-        <p:spPr>
-          <a:xfrm>
-            <a:off x="365760" y="5559552"/>
-            <a:ext cx="5547360" cy="321259"/>
-          </a:xfrm>
-          <a:prstGeom prst="rect">
-            <a:avLst/>
-          </a:prstGeom>
-          <a:noFill/>
-          <a:effectLst/>
-        </p:spPr>
-        <p:txBody>
-          <a:bodyPr wrap="none" lIns="27432" rIns="27432" tIns="18288" bIns="18288" anchor="ctr">
-            <a:spAutoFit/>
-          </a:bodyPr>
-          <a:lstStyle/>
-          <a:p>
-            <a:pPr algn="l">
-              <a:spcAft>
-                <a:spcPts val="0"/>
-              </a:spcAft>
-            </a:pPr>
-            <a:r>
-              <a:rPr sz="1632" b="0" i="0">
-                <a:solidFill>
-                  <a:srgbClr val="E7F0F3"/>
-                </a:solidFill>
-                <a:latin typeface="Arial"/>
-              </a:rPr>
-              <a:t>t_th: diffusion time</a:t>
-            </a:r>
-          </a:p>
-        </p:txBody>
-      </p:sp>
-      <p:sp>
-        <p:nvSpPr>
-          <p:cNvPr id="18" name="text17" descr="sci-ppt:C2-E09-017"/>
-          <p:cNvSpPr txBox="1"/>
-          <p:nvPr/>
-        </p:nvSpPr>
-        <p:spPr>
-          <a:xfrm>
-            <a:off x="6156960" y="4974336"/>
-            <a:ext cx="5547360" cy="321259"/>
-          </a:xfrm>
-          <a:prstGeom prst="rect">
-            <a:avLst/>
-          </a:prstGeom>
-          <a:noFill/>
-          <a:effectLst/>
-        </p:spPr>
-        <p:txBody>
-          <a:bodyPr wrap="none" lIns="27432" rIns="27432" tIns="18288" bIns="18288" anchor="ctr">
-            <a:spAutoFit/>
-          </a:bodyPr>
-          <a:lstStyle/>
-          <a:p>
-            <a:pPr algn="l">
-              <a:spcAft>
-                <a:spcPts val="0"/>
-              </a:spcAft>
-            </a:pPr>
-            <a:r>
-              <a:rPr sz="1632" b="0" i="0">
-                <a:solidFill>
-                  <a:srgbClr val="E7F0F3"/>
-                </a:solidFill>
-                <a:latin typeface="Arial"/>
-              </a:rPr>
-              <a:t>δ_T: penetration during τ_h</a:t>
-            </a:r>
-          </a:p>
-        </p:txBody>
-      </p:sp>
-      <p:sp>
-        <p:nvSpPr>
-          <p:cNvPr id="19" name="text18" descr="sci-ppt:C2-E09-018"/>
-          <p:cNvSpPr txBox="1"/>
-          <p:nvPr/>
-        </p:nvSpPr>
-        <p:spPr>
-          <a:xfrm>
-            <a:off x="6156960" y="5266944"/>
-            <a:ext cx="5547360" cy="321259"/>
-          </a:xfrm>
-          <a:prstGeom prst="rect">
-            <a:avLst/>
-          </a:prstGeom>
-          <a:noFill/>
-          <a:effectLst/>
-        </p:spPr>
-        <p:txBody>
-          <a:bodyPr wrap="none" lIns="27432" rIns="27432" tIns="18288" bIns="18288" anchor="ctr">
-            <a:spAutoFit/>
-          </a:bodyPr>
-          <a:lstStyle/>
-          <a:p>
-            <a:pPr algn="l">
-              <a:spcAft>
-                <a:spcPts val="0"/>
-              </a:spcAft>
-            </a:pPr>
-            <a:r>
-              <a:rPr sz="1632" b="0" i="0">
-                <a:solidFill>
-                  <a:srgbClr val="E7F0F3"/>
-                </a:solidFill>
-                <a:latin typeface="Arial"/>
-              </a:rPr>
-              <a:t>ΔT: thermal change</a:t>
-            </a:r>
-          </a:p>
-        </p:txBody>
-      </p:sp>
-      <p:sp>
-        <p:nvSpPr>
-          <p:cNvPr id="20" name="text19" descr="sci-ppt:C2-E09-019"/>
-          <p:cNvSpPr txBox="1"/>
-          <p:nvPr/>
-        </p:nvSpPr>
-        <p:spPr>
-          <a:xfrm>
-            <a:off x="6156960" y="5559552"/>
-            <a:ext cx="5547360" cy="321259"/>
-          </a:xfrm>
-          <a:prstGeom prst="rect">
-            <a:avLst/>
-          </a:prstGeom>
-          <a:noFill/>
-          <a:effectLst/>
-        </p:spPr>
-        <p:txBody>
-          <a:bodyPr wrap="none" lIns="27432" rIns="27432" tIns="18288" bIns="18288" anchor="ctr">
-            <a:spAutoFit/>
-          </a:bodyPr>
-          <a:lstStyle/>
-          <a:p>
-            <a:pPr algn="l">
-              <a:spcAft>
-                <a:spcPts val="0"/>
-              </a:spcAft>
-            </a:pPr>
-            <a:r>
-              <a:rPr sz="1632" b="0" i="0">
-                <a:solidFill>
-                  <a:srgbClr val="E7F0F3"/>
-                </a:solidFill>
-                <a:latin typeface="Arial"/>
-              </a:rPr>
-              <a:t>τ_h: available heating duration</a:t>
-            </a:r>
-          </a:p>
-        </p:txBody>
-      </p:sp>
-      <p:sp>
-        <p:nvSpPr>
-          <p:cNvPr id="21" name="text20" descr="sci-ppt:C2-E09-020"/>
-          <p:cNvSpPr txBox="1"/>
-          <p:nvPr/>
-        </p:nvSpPr>
-        <p:spPr>
-          <a:xfrm>
-            <a:off x="365760" y="6278880"/>
-            <a:ext cx="11277600" cy="302361"/>
-          </a:xfrm>
-          <a:prstGeom prst="rect">
-            <a:avLst/>
-          </a:prstGeom>
-          <a:noFill/>
-          <a:effectLst/>
-        </p:spPr>
-        <p:txBody>
-          <a:bodyPr wrap="none" lIns="27432" rIns="27432" tIns="18288" bIns="18288" anchor="ctr">
-            <a:spAutoFit/>
-          </a:bodyPr>
-          <a:lstStyle/>
-          <a:p>
-            <a:pPr algn="l">
-              <a:spcAft>
-                <a:spcPts val="0"/>
-              </a:spcAft>
-            </a:pPr>
-            <a:r>
-              <a:rPr sz="1536" b="0" i="0">
+              <a:rPr sz="1000" b="0" i="0">
                 <a:solidFill>
                   <a:srgbClr val="B4C7D2"/>
                 </a:solidFill>
                 <a:latin typeface="Arial"/>
               </a:rPr>
-              <a:t>Long distance costs time quadratically</a:t>
-            </a:r>
-          </a:p>
-        </p:txBody>
-      </p:sp>
-      <p:sp>
-        <p:nvSpPr>
-          <p:cNvPr id="22" name="text21" descr="sci-ppt:C2-E09-021"/>
-          <p:cNvSpPr txBox="1"/>
-          <p:nvPr/>
-        </p:nvSpPr>
-        <p:spPr>
-          <a:xfrm>
-            <a:off x="365760" y="6571488"/>
-            <a:ext cx="11277600" cy="302361"/>
-          </a:xfrm>
-          <a:prstGeom prst="rect">
-            <a:avLst/>
-          </a:prstGeom>
-          <a:noFill/>
-          <a:effectLst/>
-        </p:spPr>
-        <p:txBody>
-          <a:bodyPr wrap="none" lIns="27432" rIns="27432" tIns="18288" bIns="18288" anchor="ctr">
-            <a:spAutoFit/>
-          </a:bodyPr>
-          <a:lstStyle/>
-          <a:p>
-            <a:pPr algn="l">
-              <a:spcAft>
-                <a:spcPts val="0"/>
-              </a:spcAft>
-            </a:pPr>
-            <a:r>
-              <a:rPr sz="1536" b="0" i="0">
-                <a:solidFill>
-                  <a:srgbClr val="B4C7D2"/>
-                </a:solidFill>
-                <a:latin typeface="Arial"/>
-              </a:rPr>
-              <a:t>Optical pulse duration is not automatically whole-core heating duration</a:t>
+              <a:t>Scalings of Eq. C2-E09 evaluated with the PFC liquid properties of Eq. C2-E10.</a:t>
             </a:r>
           </a:p>
         </p:txBody>
